--- a/soutenance/soutenance.pptx
+++ b/soutenance/soutenance.pptx
@@ -21,6 +21,8 @@
     <p:sldId id="269" r:id="rId20"/>
     <p:sldId id="270" r:id="rId21"/>
     <p:sldId id="271" r:id="rId22"/>
+    <p:sldId id="272" r:id="rId23"/>
+    <p:sldId id="273" r:id="rId24"/>
   </p:sldIdLst>
   <p:sldSz cx="12191695" cy="6858000" type="screen4x3"/>
   <p:notesSz cx="6858000" cy="9144000"/>
@@ -3119,7 +3121,7 @@
         </p:nvSpPr>
         <p:spPr>
           <a:xfrm>
-            <a:off x="822960" y="1005840"/>
+            <a:off x="822960" y="914400"/>
             <a:ext cx="10515600" cy="457200"/>
           </a:xfrm>
           <a:prstGeom prst="rect">
@@ -3154,7 +3156,7 @@
         </p:nvSpPr>
         <p:spPr>
           <a:xfrm>
-            <a:off x="822960" y="1554480"/>
+            <a:off x="822960" y="1463040"/>
             <a:ext cx="10515600" cy="1463040"/>
           </a:xfrm>
           <a:prstGeom prst="rect">
@@ -3176,8 +3178,8 @@
                 </a:solidFill>
                 <a:latin typeface="Segoe UI"/>
               </a:rPr>
-              <a:t>Industrialisation d'une application web
-de gestion de projets</a:t>
+              <a:t>Plateforme e-commerce
+en microservices</a:t>
             </a:r>
           </a:p>
         </p:txBody>
@@ -3190,7 +3192,7 @@
         </p:nvSpPr>
         <p:spPr>
           <a:xfrm>
-            <a:off x="822960" y="3017520"/>
+            <a:off x="822960" y="2971800"/>
             <a:ext cx="10515600" cy="548640"/>
           </a:xfrm>
           <a:prstGeom prst="rect">
@@ -3212,7 +3214,7 @@
                 </a:solidFill>
                 <a:latin typeface="Segoe UI"/>
               </a:rPr>
-              <a:t>CI/CD · Conteneurisation · Observabilité</a:t>
+              <a:t>Persistance polyglotte · Sécurité OIDC · Observabilité</a:t>
             </a:r>
           </a:p>
         </p:txBody>
@@ -3225,7 +3227,7 @@
         </p:nvSpPr>
         <p:spPr>
           <a:xfrm>
-            <a:off x="822960" y="3749039"/>
+            <a:off x="822960" y="3703320"/>
             <a:ext cx="2011680" cy="54864"/>
           </a:xfrm>
           <a:prstGeom prst="rect">
@@ -3254,7 +3256,7 @@
         </p:nvSpPr>
         <p:spPr>
           <a:xfrm>
-            <a:off x="822960" y="4114800"/>
+            <a:off x="822960" y="4069080"/>
             <a:ext cx="10515600" cy="1280160"/>
           </a:xfrm>
           <a:prstGeom prst="rect">
@@ -3374,7 +3376,7 @@
                 </a:solidFill>
                 <a:latin typeface="Segoe UI"/>
               </a:rPr>
-              <a:t>Pipeline CI/CD — GitHub Actions</a:t>
+              <a:t>Matrice d'autorisation</a:t>
             </a:r>
           </a:p>
         </p:txBody>
@@ -3409,7 +3411,7 @@
                 </a:solidFill>
                 <a:latin typeface="Segoe UI"/>
               </a:rPr>
-              <a:t>Trois jobs en cascade, chaque étape est un garde-fou</a:t>
+              <a:t>Vérifiée de bout en bout : 401 · 403 · 200</a:t>
             </a:r>
           </a:p>
         </p:txBody>
@@ -3487,8 +3489,8 @@
           <p:nvPr/>
         </p:nvGraphicFramePr>
         <p:xfrm>
-          <a:off x="640080" y="1645920"/>
-          <a:ext cx="10972800" cy="1463040"/>
+          <a:off x="640080" y="1737360"/>
+          <a:ext cx="10972800" cy="2194560"/>
         </p:xfrm>
         <a:graphic>
           <a:graphicData uri="http://schemas.openxmlformats.org/drawingml/2006/table">
@@ -3497,9 +3499,10 @@
                 <a:tableStyleId>{5C22544A-7EE6-4342-B048-85BDC9FD1C3A}</a:tableStyleId>
               </a:tblPr>
               <a:tblGrid>
-                <a:gridCol w="1554480"/>
-                <a:gridCol w="2743200"/>
-                <a:gridCol w="6675120"/>
+                <a:gridCol w="5486400"/>
+                <a:gridCol w="1828800"/>
+                <a:gridCol w="1828800"/>
+                <a:gridCol w="1828800"/>
               </a:tblGrid>
               <a:tr h="365760">
                 <a:tc>
@@ -3514,7 +3517,7 @@
                           </a:solidFill>
                           <a:latin typeface="Segoe UI"/>
                         </a:rPr>
-                        <a:t>Job</a:t>
+                        <a:t>Ressource / opération</a:t>
                       </a:r>
                     </a:p>
                   </a:txBody>
@@ -3536,7 +3539,7 @@
                           </a:solidFill>
                           <a:latin typeface="Segoe UI"/>
                         </a:rPr>
-                        <a:t>Déclencheur</a:t>
+                        <a:t>Anonyme</a:t>
                       </a:r>
                     </a:p>
                   </a:txBody>
@@ -3558,7 +3561,29 @@
                           </a:solidFill>
                           <a:latin typeface="Segoe UI"/>
                         </a:rPr>
-                        <a:t>Étapes</a:t>
+                        <a:t>CUSTOMER</a:t>
+                      </a:r>
+                    </a:p>
+                  </a:txBody>
+                  <a:tcPr marL="73152" marR="73152" marT="27432" marB="27432">
+                    <a:solidFill>
+                      <a:srgbClr val="24344D"/>
+                    </a:solidFill>
+                  </a:tcPr>
+                </a:tc>
+                <a:tc>
+                  <a:txBody>
+                    <a:bodyPr/>
+                    <a:lstStyle/>
+                    <a:p>
+                      <a:r>
+                        <a:rPr sz="1400" b="1">
+                          <a:solidFill>
+                            <a:srgbClr val="38BDF8"/>
+                          </a:solidFill>
+                          <a:latin typeface="Segoe UI"/>
+                        </a:rPr>
+                        <a:t>ADMIN</a:t>
                       </a:r>
                     </a:p>
                   </a:txBody>
@@ -3582,7 +3607,7 @@
                           </a:solidFill>
                           <a:latin typeface="Segoe UI"/>
                         </a:rPr>
-                        <a:t>quality</a:t>
+                        <a:t>GET produits / catégories</a:t>
                       </a:r>
                     </a:p>
                   </a:txBody>
@@ -3604,7 +3629,7 @@
                           </a:solidFill>
                           <a:latin typeface="Segoe UI"/>
                         </a:rPr>
-                        <a:t>push + pull request</a:t>
+                        <a:t>200</a:t>
                       </a:r>
                     </a:p>
                   </a:txBody>
@@ -3626,7 +3651,29 @@
                           </a:solidFill>
                           <a:latin typeface="Segoe UI"/>
                         </a:rPr>
-                        <a:t>ruff check · ruff format · pytest --cov-fail-under=90 · artefact coverage</a:t>
+                        <a:t>200</a:t>
+                      </a:r>
+                    </a:p>
+                  </a:txBody>
+                  <a:tcPr marL="73152" marR="73152" marT="27432" marB="27432">
+                    <a:solidFill>
+                      <a:srgbClr val="1E293B"/>
+                    </a:solidFill>
+                  </a:tcPr>
+                </a:tc>
+                <a:tc>
+                  <a:txBody>
+                    <a:bodyPr/>
+                    <a:lstStyle/>
+                    <a:p>
+                      <a:r>
+                        <a:rPr sz="1400" b="0">
+                          <a:solidFill>
+                            <a:srgbClr val="E2E8F0"/>
+                          </a:solidFill>
+                          <a:latin typeface="Segoe UI"/>
+                        </a:rPr>
+                        <a:t>200</a:t>
                       </a:r>
                     </a:p>
                   </a:txBody>
@@ -3650,7 +3697,7 @@
                           </a:solidFill>
                           <a:latin typeface="Segoe UI"/>
                         </a:rPr>
-                        <a:t>docker</a:t>
+                        <a:t>Écriture produits / catégories</a:t>
                       </a:r>
                     </a:p>
                   </a:txBody>
@@ -3672,7 +3719,7 @@
                           </a:solidFill>
                           <a:latin typeface="Segoe UI"/>
                         </a:rPr>
-                        <a:t>push uniquement</a:t>
+                        <a:t>401</a:t>
                       </a:r>
                     </a:p>
                   </a:txBody>
@@ -3694,7 +3741,29 @@
                           </a:solidFill>
                           <a:latin typeface="Segoe UI"/>
                         </a:rPr>
-                        <a:t>login GHCR · tags automatiques (sha, latest) · build+cache GHA · push · scan Trivy</a:t>
+                        <a:t>403</a:t>
+                      </a:r>
+                    </a:p>
+                  </a:txBody>
+                  <a:tcPr marL="73152" marR="73152" marT="27432" marB="27432">
+                    <a:solidFill>
+                      <a:srgbClr val="1E293B"/>
+                    </a:solidFill>
+                  </a:tcPr>
+                </a:tc>
+                <a:tc>
+                  <a:txBody>
+                    <a:bodyPr/>
+                    <a:lstStyle/>
+                    <a:p>
+                      <a:r>
+                        <a:rPr sz="1400" b="0">
+                          <a:solidFill>
+                            <a:srgbClr val="E2E8F0"/>
+                          </a:solidFill>
+                          <a:latin typeface="Segoe UI"/>
+                        </a:rPr>
+                        <a:t>OK</a:t>
                       </a:r>
                     </a:p>
                   </a:txBody>
@@ -3718,7 +3787,7 @@
                           </a:solidFill>
                           <a:latin typeface="Segoe UI"/>
                         </a:rPr>
-                        <a:t>deploy</a:t>
+                        <a:t>GET liste des clients</a:t>
                       </a:r>
                     </a:p>
                   </a:txBody>
@@ -3740,7 +3809,7 @@
                           </a:solidFill>
                           <a:latin typeface="Segoe UI"/>
                         </a:rPr>
-                        <a:t>main + DEPLOY_ENABLED</a:t>
+                        <a:t>401</a:t>
                       </a:r>
                     </a:p>
                   </a:txBody>
@@ -3762,7 +3831,209 @@
                           </a:solidFill>
                           <a:latin typeface="Segoe UI"/>
                         </a:rPr>
-                        <a:t>SSH → docker compose pull &amp;&amp; up -d (secrets : host, user, clé)</a:t>
+                        <a:t>403</a:t>
+                      </a:r>
+                    </a:p>
+                  </a:txBody>
+                  <a:tcPr marL="73152" marR="73152" marT="27432" marB="27432">
+                    <a:solidFill>
+                      <a:srgbClr val="1E293B"/>
+                    </a:solidFill>
+                  </a:tcPr>
+                </a:tc>
+                <a:tc>
+                  <a:txBody>
+                    <a:bodyPr/>
+                    <a:lstStyle/>
+                    <a:p>
+                      <a:r>
+                        <a:rPr sz="1400" b="0">
+                          <a:solidFill>
+                            <a:srgbClr val="E2E8F0"/>
+                          </a:solidFill>
+                          <a:latin typeface="Segoe UI"/>
+                        </a:rPr>
+                        <a:t>200</a:t>
+                      </a:r>
+                    </a:p>
+                  </a:txBody>
+                  <a:tcPr marL="73152" marR="73152" marT="27432" marB="27432">
+                    <a:solidFill>
+                      <a:srgbClr val="1E293B"/>
+                    </a:solidFill>
+                  </a:tcPr>
+                </a:tc>
+              </a:tr>
+              <a:tr h="365760">
+                <a:tc>
+                  <a:txBody>
+                    <a:bodyPr/>
+                    <a:lstStyle/>
+                    <a:p>
+                      <a:r>
+                        <a:rPr sz="1400" b="0">
+                          <a:solidFill>
+                            <a:srgbClr val="E2E8F0"/>
+                          </a:solidFill>
+                          <a:latin typeface="Segoe UI"/>
+                        </a:rPr>
+                        <a:t>Paniers / commandes (les siens)</a:t>
+                      </a:r>
+                    </a:p>
+                  </a:txBody>
+                  <a:tcPr marL="73152" marR="73152" marT="27432" marB="27432">
+                    <a:solidFill>
+                      <a:srgbClr val="1E293B"/>
+                    </a:solidFill>
+                  </a:tcPr>
+                </a:tc>
+                <a:tc>
+                  <a:txBody>
+                    <a:bodyPr/>
+                    <a:lstStyle/>
+                    <a:p>
+                      <a:r>
+                        <a:rPr sz="1400" b="0">
+                          <a:solidFill>
+                            <a:srgbClr val="E2E8F0"/>
+                          </a:solidFill>
+                          <a:latin typeface="Segoe UI"/>
+                        </a:rPr>
+                        <a:t>401</a:t>
+                      </a:r>
+                    </a:p>
+                  </a:txBody>
+                  <a:tcPr marL="73152" marR="73152" marT="27432" marB="27432">
+                    <a:solidFill>
+                      <a:srgbClr val="1E293B"/>
+                    </a:solidFill>
+                  </a:tcPr>
+                </a:tc>
+                <a:tc>
+                  <a:txBody>
+                    <a:bodyPr/>
+                    <a:lstStyle/>
+                    <a:p>
+                      <a:r>
+                        <a:rPr sz="1400" b="0">
+                          <a:solidFill>
+                            <a:srgbClr val="E2E8F0"/>
+                          </a:solidFill>
+                          <a:latin typeface="Segoe UI"/>
+                        </a:rPr>
+                        <a:t>OK</a:t>
+                      </a:r>
+                    </a:p>
+                  </a:txBody>
+                  <a:tcPr marL="73152" marR="73152" marT="27432" marB="27432">
+                    <a:solidFill>
+                      <a:srgbClr val="1E293B"/>
+                    </a:solidFill>
+                  </a:tcPr>
+                </a:tc>
+                <a:tc>
+                  <a:txBody>
+                    <a:bodyPr/>
+                    <a:lstStyle/>
+                    <a:p>
+                      <a:r>
+                        <a:rPr sz="1400" b="0">
+                          <a:solidFill>
+                            <a:srgbClr val="E2E8F0"/>
+                          </a:solidFill>
+                          <a:latin typeface="Segoe UI"/>
+                        </a:rPr>
+                        <a:t>OK</a:t>
+                      </a:r>
+                    </a:p>
+                  </a:txBody>
+                  <a:tcPr marL="73152" marR="73152" marT="27432" marB="27432">
+                    <a:solidFill>
+                      <a:srgbClr val="1E293B"/>
+                    </a:solidFill>
+                  </a:tcPr>
+                </a:tc>
+              </a:tr>
+              <a:tr h="365760">
+                <a:tc>
+                  <a:txBody>
+                    <a:bodyPr/>
+                    <a:lstStyle/>
+                    <a:p>
+                      <a:r>
+                        <a:rPr sz="1400" b="0">
+                          <a:solidFill>
+                            <a:srgbClr val="E2E8F0"/>
+                          </a:solidFill>
+                          <a:latin typeface="Segoe UI"/>
+                        </a:rPr>
+                        <a:t>Paniers / commandes (autre client)</a:t>
+                      </a:r>
+                    </a:p>
+                  </a:txBody>
+                  <a:tcPr marL="73152" marR="73152" marT="27432" marB="27432">
+                    <a:solidFill>
+                      <a:srgbClr val="1E293B"/>
+                    </a:solidFill>
+                  </a:tcPr>
+                </a:tc>
+                <a:tc>
+                  <a:txBody>
+                    <a:bodyPr/>
+                    <a:lstStyle/>
+                    <a:p>
+                      <a:r>
+                        <a:rPr sz="1400" b="0">
+                          <a:solidFill>
+                            <a:srgbClr val="E2E8F0"/>
+                          </a:solidFill>
+                          <a:latin typeface="Segoe UI"/>
+                        </a:rPr>
+                        <a:t>401</a:t>
+                      </a:r>
+                    </a:p>
+                  </a:txBody>
+                  <a:tcPr marL="73152" marR="73152" marT="27432" marB="27432">
+                    <a:solidFill>
+                      <a:srgbClr val="1E293B"/>
+                    </a:solidFill>
+                  </a:tcPr>
+                </a:tc>
+                <a:tc>
+                  <a:txBody>
+                    <a:bodyPr/>
+                    <a:lstStyle/>
+                    <a:p>
+                      <a:r>
+                        <a:rPr sz="1400" b="0">
+                          <a:solidFill>
+                            <a:srgbClr val="E2E8F0"/>
+                          </a:solidFill>
+                          <a:latin typeface="Segoe UI"/>
+                        </a:rPr>
+                        <a:t>403</a:t>
+                      </a:r>
+                    </a:p>
+                  </a:txBody>
+                  <a:tcPr marL="73152" marR="73152" marT="27432" marB="27432">
+                    <a:solidFill>
+                      <a:srgbClr val="1E293B"/>
+                    </a:solidFill>
+                  </a:tcPr>
+                </a:tc>
+                <a:tc>
+                  <a:txBody>
+                    <a:bodyPr/>
+                    <a:lstStyle/>
+                    <a:p>
+                      <a:r>
+                        <a:rPr sz="1400" b="0">
+                          <a:solidFill>
+                            <a:srgbClr val="E2E8F0"/>
+                          </a:solidFill>
+                          <a:latin typeface="Segoe UI"/>
+                        </a:rPr>
+                        <a:t>OK</a:t>
                       </a:r>
                     </a:p>
                   </a:txBody>
@@ -3777,129 +4048,6 @@
           </a:graphicData>
         </a:graphic>
       </p:graphicFrame>
-      <p:sp>
-        <p:nvSpPr>
-          <p:cNvPr id="7" name="TextBox 6"/>
-          <p:cNvSpPr txBox="1"/>
-          <p:nvPr/>
-        </p:nvSpPr>
-        <p:spPr>
-          <a:xfrm>
-            <a:off x="640080" y="3931920"/>
-            <a:ext cx="10972800" cy="2286000"/>
-          </a:xfrm>
-          <a:prstGeom prst="rect">
-            <a:avLst/>
-          </a:prstGeom>
-          <a:noFill/>
-        </p:spPr>
-        <p:txBody>
-          <a:bodyPr wrap="square">
-            <a:spAutoFit/>
-          </a:bodyPr>
-          <a:lstStyle/>
-          <a:p>
-            <a:pPr>
-              <a:spcAft>
-                <a:spcPts val="1000"/>
-              </a:spcAft>
-            </a:pPr>
-            <a:r>
-              <a:rPr b="1" sz="1600">
-                <a:solidFill>
-                  <a:srgbClr val="38BDF8"/>
-                </a:solidFill>
-                <a:latin typeface="Segoe UI"/>
-              </a:rPr>
-              <a:t>• Quality gate</a:t>
-            </a:r>
-            <a:r>
-              <a:rPr sz="1600">
-                <a:solidFill>
-                  <a:srgbClr val="E2E8F0"/>
-                </a:solidFill>
-                <a:latin typeface="Segoe UI"/>
-              </a:rPr>
-              <a:t> une couverture &lt; 90 % casse la CI : pas d'image, pas de déploiement.</a:t>
-            </a:r>
-          </a:p>
-          <a:p>
-            <a:pPr>
-              <a:spcAft>
-                <a:spcPts val="1000"/>
-              </a:spcAft>
-            </a:pPr>
-            <a:r>
-              <a:rPr b="1" sz="1600">
-                <a:solidFill>
-                  <a:srgbClr val="38BDF8"/>
-                </a:solidFill>
-                <a:latin typeface="Segoe UI"/>
-              </a:rPr>
-              <a:t>• Sécurité</a:t>
-            </a:r>
-            <a:r>
-              <a:rPr sz="1600">
-                <a:solidFill>
-                  <a:srgbClr val="E2E8F0"/>
-                </a:solidFill>
-                <a:latin typeface="Segoe UI"/>
-              </a:rPr>
-              <a:t> aucun secret en dépôt — secrets GitHub injectés à l'exécution.</a:t>
-            </a:r>
-          </a:p>
-          <a:p>
-            <a:pPr>
-              <a:spcAft>
-                <a:spcPts val="1000"/>
-              </a:spcAft>
-            </a:pPr>
-            <a:r>
-              <a:rPr b="1" sz="1600">
-                <a:solidFill>
-                  <a:srgbClr val="38BDF8"/>
-                </a:solidFill>
-                <a:latin typeface="Segoe UI"/>
-              </a:rPr>
-              <a:t>• Performance</a:t>
-            </a:r>
-            <a:r>
-              <a:rPr sz="1600">
-                <a:solidFill>
-                  <a:srgbClr val="E2E8F0"/>
-                </a:solidFill>
-                <a:latin typeface="Segoe UI"/>
-              </a:rPr>
-              <a:t> cache de build GHA : reconstructions en quelques secondes.</a:t>
-            </a:r>
-          </a:p>
-          <a:p>
-            <a:pPr>
-              <a:spcAft>
-                <a:spcPts val="1000"/>
-              </a:spcAft>
-            </a:pPr>
-            <a:r>
-              <a:rPr b="1" sz="1600">
-                <a:solidFill>
-                  <a:srgbClr val="38BDF8"/>
-                </a:solidFill>
-                <a:latin typeface="Segoe UI"/>
-              </a:rPr>
-              <a:t>• Traçabilité</a:t>
-            </a:r>
-            <a:r>
-              <a:rPr sz="1600">
-                <a:solidFill>
-                  <a:srgbClr val="E2E8F0"/>
-                </a:solidFill>
-                <a:latin typeface="Segoe UI"/>
-              </a:rPr>
-              <a:t> chaque image taguée par le sha du commit déployé.</a:t>
-            </a:r>
-          </a:p>
-        </p:txBody>
-      </p:sp>
     </p:spTree>
   </p:cSld>
   <p:clrMapOvr>
@@ -3956,7 +4104,7 @@
                 </a:solidFill>
                 <a:latin typeface="Segoe UI"/>
               </a:rPr>
-              <a:t>Observabilité</a:t>
+              <a:t>L'application — boutique</a:t>
             </a:r>
           </a:p>
         </p:txBody>
@@ -3991,7 +4139,7 @@
                 </a:solidFill>
                 <a:latin typeface="Segoe UI"/>
               </a:rPr>
-              <a:t>Métriques exposées → Prometheus → Grafana</a:t>
+              <a:t>Démo : http://localhost:5173</a:t>
             </a:r>
           </a:p>
         </p:txBody>
@@ -4069,7 +4217,49 @@
         <p:spPr>
           <a:xfrm>
             <a:off x="640080" y="1554480"/>
-            <a:ext cx="5760720" cy="4206240"/>
+            <a:ext cx="7498079" cy="4820193"/>
+          </a:xfrm>
+          <a:prstGeom prst="rect">
+            <a:avLst/>
+          </a:prstGeom>
+          <a:solidFill>
+            <a:srgbClr val="1E293B"/>
+          </a:solidFill>
+          <a:ln>
+            <a:solidFill>
+              <a:srgbClr val="334155"/>
+            </a:solidFill>
+          </a:ln>
+        </p:spPr>
+        <p:txBody>
+          <a:bodyPr wrap="square" anchor="ctr">
+            <a:spAutoFit/>
+          </a:bodyPr>
+          <a:lstStyle/>
+          <a:p>
+            <a:pPr algn="ctr"/>
+            <a:r>
+              <a:rPr sz="1400">
+                <a:solidFill>
+                  <a:srgbClr val="94A3B8"/>
+                </a:solidFill>
+                <a:latin typeface="Segoe UI"/>
+              </a:rPr>
+              <a:t>[ capture a inserer : docs/assets/ecom-app.png ]</a:t>
+            </a:r>
+          </a:p>
+        </p:txBody>
+      </p:sp>
+      <p:sp>
+        <p:nvSpPr>
+          <p:cNvPr id="7" name="TextBox 6"/>
+          <p:cNvSpPr txBox="1"/>
+          <p:nvPr/>
+        </p:nvSpPr>
+        <p:spPr>
+          <a:xfrm>
+            <a:off x="8412480" y="1645920"/>
+            <a:ext cx="3383280" cy="4114800"/>
           </a:xfrm>
           <a:prstGeom prst="rect">
             <a:avLst/>
@@ -4088,22 +4278,22 @@
               </a:spcAft>
             </a:pPr>
             <a:r>
-              <a:rPr b="1" sz="1600">
+              <a:rPr b="1" sz="1500">
                 <a:solidFill>
                   <a:srgbClr val="38BDF8"/>
                 </a:solidFill>
                 <a:latin typeface="Segoe UI"/>
               </a:rPr>
-              <a:t>• Instrumentation</a:t>
-            </a:r>
-            <a:r>
-              <a:rPr sz="1600">
+              <a:t>• Connexion</a:t>
+            </a:r>
+            <a:r>
+              <a:rPr sz="1500">
                 <a:solidFill>
                   <a:srgbClr val="E2E8F0"/>
                 </a:solidFill>
                 <a:latin typeface="Segoe UI"/>
               </a:rPr>
-              <a:t> middleware : http_requests_total + histogramme de latence.</a:t>
+              <a:t> via Keycloak (PKCE)</a:t>
             </a:r>
           </a:p>
           <a:p>
@@ -4113,22 +4303,22 @@
               </a:spcAft>
             </a:pPr>
             <a:r>
-              <a:rPr b="1" sz="1600">
+              <a:rPr b="1" sz="1500">
                 <a:solidFill>
                   <a:srgbClr val="38BDF8"/>
                 </a:solidFill>
                 <a:latin typeface="Segoe UI"/>
               </a:rPr>
-              <a:t>• Collecte</a:t>
-            </a:r>
-            <a:r>
-              <a:rPr sz="1600">
+              <a:t>• Catalogue</a:t>
+            </a:r>
+            <a:r>
+              <a:rPr sz="1500">
                 <a:solidFill>
                   <a:srgbClr val="E2E8F0"/>
                 </a:solidFill>
                 <a:latin typeface="Segoe UI"/>
               </a:rPr>
-              <a:t> Prometheus scrape app:8000/metrics toutes les 5 s.</a:t>
+              <a:t> produits paginés</a:t>
             </a:r>
           </a:p>
           <a:p>
@@ -4138,22 +4328,22 @@
               </a:spcAft>
             </a:pPr>
             <a:r>
-              <a:rPr b="1" sz="1600">
+              <a:rPr b="1" sz="1500">
                 <a:solidFill>
                   <a:srgbClr val="38BDF8"/>
                 </a:solidFill>
                 <a:latin typeface="Segoe UI"/>
               </a:rPr>
-              <a:t>• Santé</a:t>
-            </a:r>
-            <a:r>
-              <a:rPr sz="1600">
+              <a:t>• Panier</a:t>
+            </a:r>
+            <a:r>
+              <a:rPr sz="1500">
                 <a:solidFill>
                   <a:srgbClr val="E2E8F0"/>
                 </a:solidFill>
                 <a:latin typeface="Segoe UI"/>
               </a:rPr>
-              <a:t> /healthz vérifie app + base — sonde Docker et readiness.</a:t>
+              <a:t> par client</a:t>
             </a:r>
           </a:p>
           <a:p>
@@ -4163,22 +4353,22 @@
               </a:spcAft>
             </a:pPr>
             <a:r>
-              <a:rPr b="1" sz="1600">
+              <a:rPr b="1" sz="1500">
                 <a:solidFill>
                   <a:srgbClr val="38BDF8"/>
                 </a:solidFill>
                 <a:latin typeface="Segoe UI"/>
               </a:rPr>
-              <a:t>• Provisioning</a:t>
-            </a:r>
-            <a:r>
-              <a:rPr sz="1600">
+              <a:t>• Commandes</a:t>
+            </a:r>
+            <a:r>
+              <a:rPr sz="1500">
                 <a:solidFill>
                   <a:srgbClr val="E2E8F0"/>
                 </a:solidFill>
                 <a:latin typeface="Segoe UI"/>
               </a:rPr>
-              <a:t> datasource + dashboard en YAML/JSON versionnés.</a:t>
+              <a:t> suivi du statut</a:t>
             </a:r>
           </a:p>
           <a:p>
@@ -4188,97 +4378,22 @@
               </a:spcAft>
             </a:pPr>
             <a:r>
-              <a:rPr b="1" sz="1600">
+              <a:rPr b="1" sz="1500">
                 <a:solidFill>
                   <a:srgbClr val="38BDF8"/>
                 </a:solidFill>
                 <a:latin typeface="Segoe UI"/>
               </a:rPr>
-              <a:t>• Alerte potentielle</a:t>
-            </a:r>
-            <a:r>
-              <a:rPr sz="1600">
+              <a:t>• API</a:t>
+            </a:r>
+            <a:r>
+              <a:rPr sz="1500">
                 <a:solidFill>
                   <a:srgbClr val="E2E8F0"/>
                 </a:solidFill>
                 <a:latin typeface="Segoe UI"/>
               </a:rPr>
-              <a:t> règles PromQL prêtes pour Alertmanager.</a:t>
-            </a:r>
-          </a:p>
-        </p:txBody>
-      </p:sp>
-      <p:sp>
-        <p:nvSpPr>
-          <p:cNvPr id="7" name="TextBox 6"/>
-          <p:cNvSpPr txBox="1"/>
-          <p:nvPr/>
-        </p:nvSpPr>
-        <p:spPr>
-          <a:xfrm>
-            <a:off x="6675120" y="1645920"/>
-            <a:ext cx="5212080" cy="3108960"/>
-          </a:xfrm>
-          <a:prstGeom prst="rect">
-            <a:avLst/>
-          </a:prstGeom>
-          <a:noFill/>
-        </p:spPr>
-        <p:txBody>
-          <a:bodyPr wrap="none">
-            <a:spAutoFit/>
-          </a:bodyPr>
-          <a:lstStyle/>
-          <a:p>
-            <a:r>
-              <a:rPr sz="1400">
-                <a:solidFill>
-                  <a:srgbClr val="E2E8F0"/>
-                </a:solidFill>
-                <a:latin typeface="Consolas"/>
-              </a:rPr>
-              <a:t>sum by (status) (
-  rate(http_requests_total[1m]))
-histogram_quantile(0.95,
-  sum by (le) (
-    rate(http_request_duration_seconds_bucket[5m])))
-up{job="pfe-flow"}</a:t>
-            </a:r>
-          </a:p>
-        </p:txBody>
-      </p:sp>
-      <p:sp>
-        <p:nvSpPr>
-          <p:cNvPr id="8" name="TextBox 7"/>
-          <p:cNvSpPr txBox="1"/>
-          <p:nvPr/>
-        </p:nvSpPr>
-        <p:spPr>
-          <a:xfrm>
-            <a:off x="6675120" y="5029200"/>
-            <a:ext cx="5212080" cy="914400"/>
-          </a:xfrm>
-          <a:prstGeom prst="rect">
-            <a:avLst/>
-          </a:prstGeom>
-          <a:noFill/>
-        </p:spPr>
-        <p:txBody>
-          <a:bodyPr wrap="square" anchor="t">
-            <a:spAutoFit/>
-          </a:bodyPr>
-          <a:lstStyle/>
-          <a:p>
-            <a:pPr algn="l"/>
-            <a:r>
-              <a:rPr sz="1400" b="0">
-                <a:solidFill>
-                  <a:srgbClr val="94A3B8"/>
-                </a:solidFill>
-                <a:latin typeface="Segoe UI"/>
-              </a:rPr>
-              <a:t>Dashboard : débit par code HTTP, latence p95,
-projets enregistrés, requêtes/min, disponibilité.</a:t>
+              <a:t> Bearer token injecté</a:t>
             </a:r>
           </a:p>
         </p:txBody>
@@ -4339,7 +4454,7 @@
                 </a:solidFill>
                 <a:latin typeface="Segoe UI"/>
               </a:rPr>
-              <a:t>Dashboard Grafana</a:t>
+              <a:t>Conteneurisation &amp; orchestration</a:t>
             </a:r>
           </a:p>
         </p:txBody>
@@ -4374,7 +4489,7 @@
                 </a:solidFill>
                 <a:latin typeface="Segoe UI"/>
               </a:rPr>
-              <a:t>Provisionné au démarrage — aucune configuration manuelle</a:t>
+              <a:t>Docker Compose — 13 conteneurs</a:t>
             </a:r>
           </a:p>
         </p:txBody>
@@ -4443,30 +4558,218 @@
           </a:p>
         </p:txBody>
       </p:sp>
-      <p:pic>
-        <p:nvPicPr>
-          <p:cNvPr id="6" name="Picture 5" descr="grafana.png"/>
-          <p:cNvPicPr>
-            <a:picLocks noChangeAspect="1"/>
-          </p:cNvPicPr>
-          <p:nvPr/>
-        </p:nvPicPr>
-        <p:blipFill>
-          <a:blip r:embed="rId2"/>
-          <a:stretch>
-            <a:fillRect/>
-          </a:stretch>
-        </p:blipFill>
-        <p:spPr>
-          <a:xfrm>
-            <a:off x="2258568" y="1554480"/>
-            <a:ext cx="7680960" cy="4937760"/>
-          </a:xfrm>
-          <a:prstGeom prst="rect">
-            <a:avLst/>
-          </a:prstGeom>
-        </p:spPr>
-      </p:pic>
+      <p:sp>
+        <p:nvSpPr>
+          <p:cNvPr id="6" name="TextBox 5"/>
+          <p:cNvSpPr txBox="1"/>
+          <p:nvPr/>
+        </p:nvSpPr>
+        <p:spPr>
+          <a:xfrm>
+            <a:off x="640080" y="1554480"/>
+            <a:ext cx="5669280" cy="4572000"/>
+          </a:xfrm>
+          <a:prstGeom prst="rect">
+            <a:avLst/>
+          </a:prstGeom>
+          <a:noFill/>
+        </p:spPr>
+        <p:txBody>
+          <a:bodyPr wrap="square">
+            <a:spAutoFit/>
+          </a:bodyPr>
+          <a:lstStyle/>
+          <a:p>
+            <a:pPr>
+              <a:spcAft>
+                <a:spcPts val="1000"/>
+              </a:spcAft>
+            </a:pPr>
+            <a:r>
+              <a:rPr b="1" sz="1500">
+                <a:solidFill>
+                  <a:srgbClr val="38BDF8"/>
+                </a:solidFill>
+                <a:latin typeface="Segoe UI"/>
+              </a:rPr>
+              <a:t>• Images</a:t>
+            </a:r>
+            <a:r>
+              <a:rPr sz="1500">
+                <a:solidFill>
+                  <a:srgbClr val="E2E8F0"/>
+                </a:solidFill>
+                <a:latin typeface="Segoe UI"/>
+              </a:rPr>
+              <a:t> une image par service (build Maven/JVM, frontend Nginx).</a:t>
+            </a:r>
+          </a:p>
+          <a:p>
+            <a:pPr>
+              <a:spcAft>
+                <a:spcPts val="1000"/>
+              </a:spcAft>
+            </a:pPr>
+            <a:r>
+              <a:rPr b="1" sz="1500">
+                <a:solidFill>
+                  <a:srgbClr val="38BDF8"/>
+                </a:solidFill>
+                <a:latin typeface="Segoe UI"/>
+              </a:rPr>
+              <a:t>• Healthchecks</a:t>
+            </a:r>
+            <a:r>
+              <a:rPr sz="1500">
+                <a:solidFill>
+                  <a:srgbClr val="E2E8F0"/>
+                </a:solidFill>
+                <a:latin typeface="Segoe UI"/>
+              </a:rPr>
+              <a:t> chaque service expose sa sonde de santé.</a:t>
+            </a:r>
+          </a:p>
+          <a:p>
+            <a:pPr>
+              <a:spcAft>
+                <a:spcPts val="1000"/>
+              </a:spcAft>
+            </a:pPr>
+            <a:r>
+              <a:rPr b="1" sz="1500">
+                <a:solidFill>
+                  <a:srgbClr val="38BDF8"/>
+                </a:solidFill>
+                <a:latin typeface="Segoe UI"/>
+              </a:rPr>
+              <a:t>• Chaîne</a:t>
+            </a:r>
+            <a:r>
+              <a:rPr sz="1500">
+                <a:solidFill>
+                  <a:srgbClr val="E2E8F0"/>
+                </a:solidFill>
+                <a:latin typeface="Segoe UI"/>
+              </a:rPr>
+              <a:t> depends_on condition: service_healthy (infra → services → gateway).</a:t>
+            </a:r>
+          </a:p>
+          <a:p>
+            <a:pPr>
+              <a:spcAft>
+                <a:spcPts val="1000"/>
+              </a:spcAft>
+            </a:pPr>
+            <a:r>
+              <a:rPr b="1" sz="1500">
+                <a:solidFill>
+                  <a:srgbClr val="38BDF8"/>
+                </a:solidFill>
+                <a:latin typeface="Segoe UI"/>
+              </a:rPr>
+              <a:t>• Volumes</a:t>
+            </a:r>
+            <a:r>
+              <a:rPr sz="1500">
+                <a:solidFill>
+                  <a:srgbClr val="E2E8F0"/>
+                </a:solidFill>
+                <a:latin typeface="Segoe UI"/>
+              </a:rPr>
+              <a:t> postgres/mongo/keycloak/prometheus/grafana : données persistantes.</a:t>
+            </a:r>
+          </a:p>
+          <a:p>
+            <a:pPr>
+              <a:spcAft>
+                <a:spcPts val="1000"/>
+              </a:spcAft>
+            </a:pPr>
+            <a:r>
+              <a:rPr b="1" sz="1500">
+                <a:solidFill>
+                  <a:srgbClr val="38BDF8"/>
+                </a:solidFill>
+                <a:latin typeface="Segoe UI"/>
+              </a:rPr>
+              <a:t>• Réseau</a:t>
+            </a:r>
+            <a:r>
+              <a:rPr sz="1500">
+                <a:solidFill>
+                  <a:srgbClr val="E2E8F0"/>
+                </a:solidFill>
+                <a:latin typeface="Segoe UI"/>
+              </a:rPr>
+              <a:t> services métier privés ; PostgreSQL sans port hôte ; points d'entrée publiés.</a:t>
+            </a:r>
+          </a:p>
+          <a:p>
+            <a:pPr>
+              <a:spcAft>
+                <a:spcPts val="1000"/>
+              </a:spcAft>
+            </a:pPr>
+            <a:r>
+              <a:rPr b="1" sz="1500">
+                <a:solidFill>
+                  <a:srgbClr val="38BDF8"/>
+                </a:solidFill>
+                <a:latin typeface="Segoe UI"/>
+              </a:rPr>
+              <a:t>• Ports</a:t>
+            </a:r>
+            <a:r>
+              <a:rPr sz="1500">
+                <a:solidFill>
+                  <a:srgbClr val="E2E8F0"/>
+                </a:solidFill>
+                <a:latin typeface="Segoe UI"/>
+              </a:rPr>
+              <a:t> gateway 8090, frontend 5173, keycloak 8181, prom 9090, grafana 3000.</a:t>
+            </a:r>
+          </a:p>
+        </p:txBody>
+      </p:sp>
+      <p:sp>
+        <p:nvSpPr>
+          <p:cNvPr id="7" name="TextBox 6"/>
+          <p:cNvSpPr txBox="1"/>
+          <p:nvPr/>
+        </p:nvSpPr>
+        <p:spPr>
+          <a:xfrm>
+            <a:off x="6675120" y="1737360"/>
+            <a:ext cx="5212080" cy="3657600"/>
+          </a:xfrm>
+          <a:prstGeom prst="rect">
+            <a:avLst/>
+          </a:prstGeom>
+          <a:noFill/>
+        </p:spPr>
+        <p:txBody>
+          <a:bodyPr wrap="none">
+            <a:spAutoFit/>
+          </a:bodyPr>
+          <a:lstStyle/>
+          <a:p>
+            <a:r>
+              <a:rPr sz="1200">
+                <a:solidFill>
+                  <a:srgbClr val="E2E8F0"/>
+                </a:solidFill>
+                <a:latin typeface="Consolas"/>
+              </a:rPr>
+              <a:t>config-server ─┐
+               ├─► eureka ─► 4 services ─► gateway ─► frontend
+discovery ─────┘        ▲
+postgres · mongo · keycloak ┘
+prometheus ─► scrape 7 ─► grafana
+docker compose -f docker-compose.ecom.yml up -d --build</a:t>
+            </a:r>
+          </a:p>
+        </p:txBody>
+      </p:sp>
     </p:spTree>
   </p:cSld>
   <p:clrMapOvr>
@@ -4523,7 +4826,7 @@
                 </a:solidFill>
                 <a:latin typeface="Segoe UI"/>
               </a:rPr>
-              <a:t>Tests &amp; résultats</a:t>
+              <a:t>Observabilité</a:t>
             </a:r>
           </a:p>
         </p:txBody>
@@ -4531,6 +4834,41 @@
       <p:sp>
         <p:nvSpPr>
           <p:cNvPr id="3" name="TextBox 2"/>
+          <p:cNvSpPr txBox="1"/>
+          <p:nvPr/>
+        </p:nvSpPr>
+        <p:spPr>
+          <a:xfrm>
+            <a:off x="548640" y="914400"/>
+            <a:ext cx="11064240" cy="365760"/>
+          </a:xfrm>
+          <a:prstGeom prst="rect">
+            <a:avLst/>
+          </a:prstGeom>
+          <a:noFill/>
+        </p:spPr>
+        <p:txBody>
+          <a:bodyPr wrap="square" anchor="t">
+            <a:spAutoFit/>
+          </a:bodyPr>
+          <a:lstStyle/>
+          <a:p>
+            <a:pPr algn="l"/>
+            <a:r>
+              <a:rPr sz="1400" b="0">
+                <a:solidFill>
+                  <a:srgbClr val="94A3B8"/>
+                </a:solidFill>
+                <a:latin typeface="Segoe UI"/>
+              </a:rPr>
+              <a:t>Métriques exposées → Prometheus → Grafana</a:t>
+            </a:r>
+          </a:p>
+        </p:txBody>
+      </p:sp>
+      <p:sp>
+        <p:nvSpPr>
+          <p:cNvPr id="4" name="TextBox 3"/>
           <p:cNvSpPr txBox="1"/>
           <p:nvPr/>
         </p:nvSpPr>
@@ -4559,7 +4897,7 @@
       </p:sp>
       <p:sp>
         <p:nvSpPr>
-          <p:cNvPr id="4" name="TextBox 3"/>
+          <p:cNvPr id="5" name="TextBox 4"/>
           <p:cNvSpPr txBox="1"/>
           <p:nvPr/>
         </p:nvSpPr>
@@ -4594,481 +4932,187 @@
       </p:sp>
       <p:sp>
         <p:nvSpPr>
-          <p:cNvPr id="5" name="TextBox 4"/>
+          <p:cNvPr id="6" name="TextBox 5"/>
           <p:cNvSpPr txBox="1"/>
           <p:nvPr/>
         </p:nvSpPr>
         <p:spPr>
           <a:xfrm>
-            <a:off x="640080" y="1645920"/>
-            <a:ext cx="2651760" cy="1371600"/>
-          </a:xfrm>
-          <a:prstGeom prst="rect">
-            <a:avLst/>
-          </a:prstGeom>
-          <a:solidFill>
-            <a:srgbClr val="1E293B"/>
-          </a:solidFill>
-          <a:ln>
-            <a:solidFill>
-              <a:srgbClr val="334155"/>
-            </a:solidFill>
-          </a:ln>
+            <a:off x="640080" y="1554480"/>
+            <a:ext cx="5760720" cy="4389120"/>
+          </a:xfrm>
+          <a:prstGeom prst="rect">
+            <a:avLst/>
+          </a:prstGeom>
+          <a:noFill/>
+        </p:spPr>
+        <p:txBody>
+          <a:bodyPr wrap="square">
+            <a:spAutoFit/>
+          </a:bodyPr>
+          <a:lstStyle/>
+          <a:p>
+            <a:pPr>
+              <a:spcAft>
+                <a:spcPts val="1000"/>
+              </a:spcAft>
+            </a:pPr>
+            <a:r>
+              <a:rPr b="1" sz="1500">
+                <a:solidFill>
+                  <a:srgbClr val="38BDF8"/>
+                </a:solidFill>
+                <a:latin typeface="Segoe UI"/>
+              </a:rPr>
+              <a:t>• Instrumentation</a:t>
+            </a:r>
+            <a:r>
+              <a:rPr sz="1500">
+                <a:solidFill>
+                  <a:srgbClr val="E2E8F0"/>
+                </a:solidFill>
+                <a:latin typeface="Segoe UI"/>
+              </a:rPr>
+              <a:t> Spring Boot Actuator + Micrometer par service.</a:t>
+            </a:r>
+          </a:p>
+          <a:p>
+            <a:pPr>
+              <a:spcAft>
+                <a:spcPts val="1000"/>
+              </a:spcAft>
+            </a:pPr>
+            <a:r>
+              <a:rPr b="1" sz="1500">
+                <a:solidFill>
+                  <a:srgbClr val="38BDF8"/>
+                </a:solidFill>
+                <a:latin typeface="Segoe UI"/>
+              </a:rPr>
+              <a:t>• Collecte</a:t>
+            </a:r>
+            <a:r>
+              <a:rPr sz="1500">
+                <a:solidFill>
+                  <a:srgbClr val="E2E8F0"/>
+                </a:solidFill>
+                <a:latin typeface="Segoe UI"/>
+              </a:rPr>
+              <a:t> Prometheus scrape les 7 cibles (modèle pull).</a:t>
+            </a:r>
+          </a:p>
+          <a:p>
+            <a:pPr>
+              <a:spcAft>
+                <a:spcPts val="1000"/>
+              </a:spcAft>
+            </a:pPr>
+            <a:r>
+              <a:rPr b="1" sz="1500">
+                <a:solidFill>
+                  <a:srgbClr val="38BDF8"/>
+                </a:solidFill>
+                <a:latin typeface="Segoe UI"/>
+              </a:rPr>
+              <a:t>• Export</a:t>
+            </a:r>
+            <a:r>
+              <a:rPr sz="1500">
+                <a:solidFill>
+                  <a:srgbClr val="E2E8F0"/>
+                </a:solidFill>
+                <a:latin typeface="Segoe UI"/>
+              </a:rPr>
+              <a:t> /actuator/prometheus : compteurs + histogrammes de latence.</a:t>
+            </a:r>
+          </a:p>
+          <a:p>
+            <a:pPr>
+              <a:spcAft>
+                <a:spcPts val="1000"/>
+              </a:spcAft>
+            </a:pPr>
+            <a:r>
+              <a:rPr b="1" sz="1500">
+                <a:solidFill>
+                  <a:srgbClr val="38BDF8"/>
+                </a:solidFill>
+                <a:latin typeface="Segoe UI"/>
+              </a:rPr>
+              <a:t>• Restitution</a:t>
+            </a:r>
+            <a:r>
+              <a:rPr sz="1500">
+                <a:solidFill>
+                  <a:srgbClr val="E2E8F0"/>
+                </a:solidFill>
+                <a:latin typeface="Segoe UI"/>
+              </a:rPr>
+              <a:t> dashboard Grafana provisionné par code (11 panneaux).</a:t>
+            </a:r>
+          </a:p>
+          <a:p>
+            <a:pPr>
+              <a:spcAft>
+                <a:spcPts val="1000"/>
+              </a:spcAft>
+            </a:pPr>
+            <a:r>
+              <a:rPr b="1" sz="1500">
+                <a:solidFill>
+                  <a:srgbClr val="38BDF8"/>
+                </a:solidFill>
+                <a:latin typeface="Segoe UI"/>
+              </a:rPr>
+              <a:t>• Isolation</a:t>
+            </a:r>
+            <a:r>
+              <a:rPr sz="1500">
+                <a:solidFill>
+                  <a:srgbClr val="E2E8F0"/>
+                </a:solidFill>
+                <a:latin typeface="Segoe UI"/>
+              </a:rPr>
+              <a:t> Actuator du gateway sur un port de gestion interne.</a:t>
+            </a:r>
+          </a:p>
+        </p:txBody>
+      </p:sp>
+      <p:sp>
+        <p:nvSpPr>
+          <p:cNvPr id="7" name="TextBox 6"/>
+          <p:cNvSpPr txBox="1"/>
+          <p:nvPr/>
+        </p:nvSpPr>
+        <p:spPr>
+          <a:xfrm>
+            <a:off x="6675120" y="1737360"/>
+            <a:ext cx="5212080" cy="2926080"/>
+          </a:xfrm>
+          <a:prstGeom prst="rect">
+            <a:avLst/>
+          </a:prstGeom>
+          <a:noFill/>
         </p:spPr>
         <p:txBody>
           <a:bodyPr wrap="none">
             <a:spAutoFit/>
           </a:bodyPr>
           <a:lstStyle/>
-          <a:p/>
-        </p:txBody>
-      </p:sp>
-      <p:sp>
-        <p:nvSpPr>
-          <p:cNvPr id="6" name="TextBox 5"/>
-          <p:cNvSpPr txBox="1"/>
-          <p:nvPr/>
-        </p:nvSpPr>
-        <p:spPr>
-          <a:xfrm>
-            <a:off x="640080" y="1828800"/>
-            <a:ext cx="2651760" cy="731520"/>
-          </a:xfrm>
-          <a:prstGeom prst="rect">
-            <a:avLst/>
-          </a:prstGeom>
-          <a:noFill/>
-        </p:spPr>
-        <p:txBody>
-          <a:bodyPr wrap="square" anchor="t">
-            <a:spAutoFit/>
-          </a:bodyPr>
-          <a:lstStyle/>
-          <a:p>
-            <a:pPr algn="ctr"/>
-            <a:r>
-              <a:rPr sz="3600" b="1">
-                <a:solidFill>
-                  <a:srgbClr val="38BDF8"/>
-                </a:solidFill>
-                <a:latin typeface="Segoe UI"/>
-              </a:rPr>
-              <a:t>9</a:t>
-            </a:r>
-          </a:p>
-        </p:txBody>
-      </p:sp>
-      <p:sp>
-        <p:nvSpPr>
-          <p:cNvPr id="7" name="TextBox 6"/>
-          <p:cNvSpPr txBox="1"/>
-          <p:nvPr/>
-        </p:nvSpPr>
-        <p:spPr>
-          <a:xfrm>
-            <a:off x="640080" y="2560320"/>
-            <a:ext cx="2651760" cy="365760"/>
-          </a:xfrm>
-          <a:prstGeom prst="rect">
-            <a:avLst/>
-          </a:prstGeom>
-          <a:noFill/>
-        </p:spPr>
-        <p:txBody>
-          <a:bodyPr wrap="square" anchor="t">
-            <a:spAutoFit/>
-          </a:bodyPr>
-          <a:lstStyle/>
-          <a:p>
-            <a:pPr algn="ctr"/>
-            <a:r>
-              <a:rPr sz="1300" b="0">
-                <a:solidFill>
-                  <a:srgbClr val="94A3B8"/>
-                </a:solidFill>
-                <a:latin typeface="Segoe UI"/>
-              </a:rPr>
-              <a:t>tests fonctionnels</a:t>
-            </a:r>
-          </a:p>
-        </p:txBody>
-      </p:sp>
-      <p:sp>
-        <p:nvSpPr>
-          <p:cNvPr id="8" name="TextBox 7"/>
-          <p:cNvSpPr txBox="1"/>
-          <p:nvPr/>
-        </p:nvSpPr>
-        <p:spPr>
-          <a:xfrm>
-            <a:off x="3520439" y="1645920"/>
-            <a:ext cx="2651760" cy="1371600"/>
-          </a:xfrm>
-          <a:prstGeom prst="rect">
-            <a:avLst/>
-          </a:prstGeom>
-          <a:solidFill>
-            <a:srgbClr val="1E293B"/>
-          </a:solidFill>
-          <a:ln>
-            <a:solidFill>
-              <a:srgbClr val="334155"/>
-            </a:solidFill>
-          </a:ln>
-        </p:spPr>
-        <p:txBody>
-          <a:bodyPr wrap="none">
-            <a:spAutoFit/>
-          </a:bodyPr>
-          <a:lstStyle/>
-          <a:p/>
-        </p:txBody>
-      </p:sp>
-      <p:sp>
-        <p:nvSpPr>
-          <p:cNvPr id="9" name="TextBox 8"/>
-          <p:cNvSpPr txBox="1"/>
-          <p:nvPr/>
-        </p:nvSpPr>
-        <p:spPr>
-          <a:xfrm>
-            <a:off x="3520439" y="1828800"/>
-            <a:ext cx="2651760" cy="731520"/>
-          </a:xfrm>
-          <a:prstGeom prst="rect">
-            <a:avLst/>
-          </a:prstGeom>
-          <a:noFill/>
-        </p:spPr>
-        <p:txBody>
-          <a:bodyPr wrap="square" anchor="t">
-            <a:spAutoFit/>
-          </a:bodyPr>
-          <a:lstStyle/>
-          <a:p>
-            <a:pPr algn="ctr"/>
-            <a:r>
-              <a:rPr sz="3600" b="1">
-                <a:solidFill>
-                  <a:srgbClr val="38BDF8"/>
-                </a:solidFill>
-                <a:latin typeface="Segoe UI"/>
-              </a:rPr>
-              <a:t>99 %</a:t>
-            </a:r>
-          </a:p>
-        </p:txBody>
-      </p:sp>
-      <p:sp>
-        <p:nvSpPr>
-          <p:cNvPr id="10" name="TextBox 9"/>
-          <p:cNvSpPr txBox="1"/>
-          <p:nvPr/>
-        </p:nvSpPr>
-        <p:spPr>
-          <a:xfrm>
-            <a:off x="3520439" y="2560320"/>
-            <a:ext cx="2651760" cy="365760"/>
-          </a:xfrm>
-          <a:prstGeom prst="rect">
-            <a:avLst/>
-          </a:prstGeom>
-          <a:noFill/>
-        </p:spPr>
-        <p:txBody>
-          <a:bodyPr wrap="square" anchor="t">
-            <a:spAutoFit/>
-          </a:bodyPr>
-          <a:lstStyle/>
-          <a:p>
-            <a:pPr algn="ctr"/>
-            <a:r>
-              <a:rPr sz="1300" b="0">
-                <a:solidFill>
-                  <a:srgbClr val="94A3B8"/>
-                </a:solidFill>
-                <a:latin typeface="Segoe UI"/>
-              </a:rPr>
-              <a:t>couverture de code</a:t>
-            </a:r>
-          </a:p>
-        </p:txBody>
-      </p:sp>
-      <p:sp>
-        <p:nvSpPr>
-          <p:cNvPr id="11" name="TextBox 10"/>
-          <p:cNvSpPr txBox="1"/>
-          <p:nvPr/>
-        </p:nvSpPr>
-        <p:spPr>
-          <a:xfrm>
-            <a:off x="6400800" y="1645920"/>
-            <a:ext cx="2651760" cy="1371600"/>
-          </a:xfrm>
-          <a:prstGeom prst="rect">
-            <a:avLst/>
-          </a:prstGeom>
-          <a:solidFill>
-            <a:srgbClr val="1E293B"/>
-          </a:solidFill>
-          <a:ln>
-            <a:solidFill>
-              <a:srgbClr val="334155"/>
-            </a:solidFill>
-          </a:ln>
-        </p:spPr>
-        <p:txBody>
-          <a:bodyPr wrap="none">
-            <a:spAutoFit/>
-          </a:bodyPr>
-          <a:lstStyle/>
-          <a:p/>
-        </p:txBody>
-      </p:sp>
-      <p:sp>
-        <p:nvSpPr>
-          <p:cNvPr id="12" name="TextBox 11"/>
-          <p:cNvSpPr txBox="1"/>
-          <p:nvPr/>
-        </p:nvSpPr>
-        <p:spPr>
-          <a:xfrm>
-            <a:off x="6400800" y="1828800"/>
-            <a:ext cx="2651760" cy="731520"/>
-          </a:xfrm>
-          <a:prstGeom prst="rect">
-            <a:avLst/>
-          </a:prstGeom>
-          <a:noFill/>
-        </p:spPr>
-        <p:txBody>
-          <a:bodyPr wrap="square" anchor="t">
-            <a:spAutoFit/>
-          </a:bodyPr>
-          <a:lstStyle/>
-          <a:p>
-            <a:pPr algn="ctr"/>
-            <a:r>
-              <a:rPr sz="3600" b="1">
-                <a:solidFill>
-                  <a:srgbClr val="38BDF8"/>
-                </a:solidFill>
-                <a:latin typeface="Segoe UI"/>
-              </a:rPr>
-              <a:t>90 %</a:t>
-            </a:r>
-          </a:p>
-        </p:txBody>
-      </p:sp>
-      <p:sp>
-        <p:nvSpPr>
-          <p:cNvPr id="13" name="TextBox 12"/>
-          <p:cNvSpPr txBox="1"/>
-          <p:nvPr/>
-        </p:nvSpPr>
-        <p:spPr>
-          <a:xfrm>
-            <a:off x="6400800" y="2560320"/>
-            <a:ext cx="2651760" cy="365760"/>
-          </a:xfrm>
-          <a:prstGeom prst="rect">
-            <a:avLst/>
-          </a:prstGeom>
-          <a:noFill/>
-        </p:spPr>
-        <p:txBody>
-          <a:bodyPr wrap="square" anchor="t">
-            <a:spAutoFit/>
-          </a:bodyPr>
-          <a:lstStyle/>
-          <a:p>
-            <a:pPr algn="ctr"/>
-            <a:r>
-              <a:rPr sz="1300" b="0">
-                <a:solidFill>
-                  <a:srgbClr val="94A3B8"/>
-                </a:solidFill>
-                <a:latin typeface="Segoe UI"/>
-              </a:rPr>
-              <a:t>seuil bloquant CI</a:t>
-            </a:r>
-          </a:p>
-        </p:txBody>
-      </p:sp>
-      <p:sp>
-        <p:nvSpPr>
-          <p:cNvPr id="14" name="TextBox 13"/>
-          <p:cNvSpPr txBox="1"/>
-          <p:nvPr/>
-        </p:nvSpPr>
-        <p:spPr>
-          <a:xfrm>
-            <a:off x="9281159" y="1645920"/>
-            <a:ext cx="2651760" cy="1371600"/>
-          </a:xfrm>
-          <a:prstGeom prst="rect">
-            <a:avLst/>
-          </a:prstGeom>
-          <a:solidFill>
-            <a:srgbClr val="1E293B"/>
-          </a:solidFill>
-          <a:ln>
-            <a:solidFill>
-              <a:srgbClr val="334155"/>
-            </a:solidFill>
-          </a:ln>
-        </p:spPr>
-        <p:txBody>
-          <a:bodyPr wrap="none">
-            <a:spAutoFit/>
-          </a:bodyPr>
-          <a:lstStyle/>
-          <a:p/>
-        </p:txBody>
-      </p:sp>
-      <p:sp>
-        <p:nvSpPr>
-          <p:cNvPr id="15" name="TextBox 14"/>
-          <p:cNvSpPr txBox="1"/>
-          <p:nvPr/>
-        </p:nvSpPr>
-        <p:spPr>
-          <a:xfrm>
-            <a:off x="9281159" y="1828800"/>
-            <a:ext cx="2651760" cy="731520"/>
-          </a:xfrm>
-          <a:prstGeom prst="rect">
-            <a:avLst/>
-          </a:prstGeom>
-          <a:noFill/>
-        </p:spPr>
-        <p:txBody>
-          <a:bodyPr wrap="square" anchor="t">
-            <a:spAutoFit/>
-          </a:bodyPr>
-          <a:lstStyle/>
-          <a:p>
-            <a:pPr algn="ctr"/>
-            <a:r>
-              <a:rPr sz="3600" b="1">
-                <a:solidFill>
-                  <a:srgbClr val="38BDF8"/>
-                </a:solidFill>
-                <a:latin typeface="Segoe UI"/>
-              </a:rPr>
-              <a:t>4</a:t>
-            </a:r>
-          </a:p>
-        </p:txBody>
-      </p:sp>
-      <p:sp>
-        <p:nvSpPr>
-          <p:cNvPr id="16" name="TextBox 15"/>
-          <p:cNvSpPr txBox="1"/>
-          <p:nvPr/>
-        </p:nvSpPr>
-        <p:spPr>
-          <a:xfrm>
-            <a:off x="9281159" y="2560320"/>
-            <a:ext cx="2651760" cy="365760"/>
-          </a:xfrm>
-          <a:prstGeom prst="rect">
-            <a:avLst/>
-          </a:prstGeom>
-          <a:noFill/>
-        </p:spPr>
-        <p:txBody>
-          <a:bodyPr wrap="square" anchor="t">
-            <a:spAutoFit/>
-          </a:bodyPr>
-          <a:lstStyle/>
-          <a:p>
-            <a:pPr algn="ctr"/>
-            <a:r>
-              <a:rPr sz="1300" b="0">
-                <a:solidFill>
-                  <a:srgbClr val="94A3B8"/>
-                </a:solidFill>
-                <a:latin typeface="Segoe UI"/>
-              </a:rPr>
-              <a:t>services conteneurisés</a:t>
-            </a:r>
-          </a:p>
-        </p:txBody>
-      </p:sp>
-      <p:sp>
-        <p:nvSpPr>
-          <p:cNvPr id="17" name="TextBox 16"/>
-          <p:cNvSpPr txBox="1"/>
-          <p:nvPr/>
-        </p:nvSpPr>
-        <p:spPr>
-          <a:xfrm>
-            <a:off x="640080" y="3383280"/>
-            <a:ext cx="10972800" cy="2377440"/>
-          </a:xfrm>
-          <a:prstGeom prst="rect">
-            <a:avLst/>
-          </a:prstGeom>
-          <a:noFill/>
-        </p:spPr>
-        <p:txBody>
-          <a:bodyPr wrap="none">
-            <a:spAutoFit/>
-          </a:bodyPr>
-          <a:lstStyle/>
-          <a:p>
-            <a:r>
-              <a:rPr sz="1400">
+          <a:p>
+            <a:r>
+              <a:rPr sz="1200">
                 <a:solidFill>
                   <a:srgbClr val="E2E8F0"/>
                 </a:solidFill>
                 <a:latin typeface="Consolas"/>
               </a:rPr>
-              <a:t>$ pytest --cov=app
-9 passed in 1.97s
-Name              Stmts   Miss  Cover
-app/config.py         3      0   100%
-app/database.py      13      0   100%
-app/main.py         105      1    99%
-app/metrics.py        4      0   100%
-app/models.py        25      0   100%
-TOTAL               150      1    99%</a:t>
-            </a:r>
-          </a:p>
-        </p:txBody>
-      </p:sp>
-      <p:sp>
-        <p:nvSpPr>
-          <p:cNvPr id="18" name="TextBox 17"/>
-          <p:cNvSpPr txBox="1"/>
-          <p:nvPr/>
-        </p:nvSpPr>
-        <p:spPr>
-          <a:xfrm>
-            <a:off x="640080" y="5943600"/>
-            <a:ext cx="10972800" cy="457200"/>
-          </a:xfrm>
-          <a:prstGeom prst="rect">
-            <a:avLst/>
-          </a:prstGeom>
-          <a:noFill/>
-        </p:spPr>
-        <p:txBody>
-          <a:bodyPr wrap="square" anchor="t">
-            <a:spAutoFit/>
-          </a:bodyPr>
-          <a:lstStyle/>
-          <a:p>
-            <a:pPr algn="l"/>
-            <a:r>
-              <a:rPr sz="1400" b="0">
-                <a:solidFill>
-                  <a:srgbClr val="94A3B8"/>
-                </a:solidFill>
-                <a:latin typeface="Segoe UI"/>
-              </a:rPr>
-              <a:t>Scénario de démo automatisé : scripts/demo.ps1 (stack, données, trafic, ouverture des interfaces).</a:t>
+              <a:t>sum by (application) (
+  rate(http_server_requests_seconds_count[1m]))
+histogram_quantile(0.95,
+  sum by (le) (
+    rate(http_server_requests_seconds_bucket[5m])))
+up{job="pfe-ecom"}</a:t>
             </a:r>
           </a:p>
         </p:txBody>
@@ -5129,7 +5173,7 @@
                 </a:solidFill>
                 <a:latin typeface="Segoe UI"/>
               </a:rPr>
-              <a:t>Résultats de la pile complète</a:t>
+              <a:t>Dashboard Grafana</a:t>
             </a:r>
           </a:p>
         </p:txBody>
@@ -5164,7 +5208,7 @@
                 </a:solidFill>
                 <a:latin typeface="Segoe UI"/>
               </a:rPr>
-              <a:t>Vérifié en conditions réelles</a:t>
+              <a:t>pfe-ecom-overview — provisionné au démarrage</a:t>
             </a:r>
           </a:p>
         </p:txBody>
@@ -5233,17 +5277,588 @@
           </a:p>
         </p:txBody>
       </p:sp>
+      <p:sp>
+        <p:nvSpPr>
+          <p:cNvPr id="6" name="TextBox 5"/>
+          <p:cNvSpPr txBox="1"/>
+          <p:nvPr/>
+        </p:nvSpPr>
+        <p:spPr>
+          <a:xfrm>
+            <a:off x="1188720" y="1554480"/>
+            <a:ext cx="9692640" cy="6230982"/>
+          </a:xfrm>
+          <a:prstGeom prst="rect">
+            <a:avLst/>
+          </a:prstGeom>
+          <a:solidFill>
+            <a:srgbClr val="1E293B"/>
+          </a:solidFill>
+          <a:ln>
+            <a:solidFill>
+              <a:srgbClr val="334155"/>
+            </a:solidFill>
+          </a:ln>
+        </p:spPr>
+        <p:txBody>
+          <a:bodyPr wrap="square" anchor="ctr">
+            <a:spAutoFit/>
+          </a:bodyPr>
+          <a:lstStyle/>
+          <a:p>
+            <a:pPr algn="ctr"/>
+            <a:r>
+              <a:rPr sz="1400">
+                <a:solidFill>
+                  <a:srgbClr val="94A3B8"/>
+                </a:solidFill>
+                <a:latin typeface="Segoe UI"/>
+              </a:rPr>
+              <a:t>[ capture a inserer : docs/assets/ecom-grafana.png ]</a:t>
+            </a:r>
+          </a:p>
+        </p:txBody>
+      </p:sp>
+    </p:spTree>
+  </p:cSld>
+  <p:clrMapOvr>
+    <a:masterClrMapping/>
+  </p:clrMapOvr>
+</p:sld>
+</file>
+
+<file path=ppt/slides/slide15.xml><?xml version="1.0" encoding="utf-8"?>
+<p:sld xmlns:a="http://schemas.openxmlformats.org/drawingml/2006/main" xmlns:p="http://schemas.openxmlformats.org/presentationml/2006/main" xmlns:r="http://schemas.openxmlformats.org/officeDocument/2006/relationships">
+  <p:cSld>
+    <p:bg>
+      <p:bgPr>
+        <a:solidFill>
+          <a:srgbClr val="0F172A"/>
+        </a:solidFill>
+        <a:effectLst/>
+      </p:bgPr>
+    </p:bg>
+    <p:spTree>
+      <p:nvGrpSpPr>
+        <p:cNvPr id="1" name=""/>
+        <p:cNvGrpSpPr/>
+        <p:nvPr/>
+      </p:nvGrpSpPr>
+      <p:grpSpPr/>
+      <p:sp>
+        <p:nvSpPr>
+          <p:cNvPr id="2" name="TextBox 1"/>
+          <p:cNvSpPr txBox="1"/>
+          <p:nvPr/>
+        </p:nvSpPr>
+        <p:spPr>
+          <a:xfrm>
+            <a:off x="548640" y="292608"/>
+            <a:ext cx="11064240" cy="731520"/>
+          </a:xfrm>
+          <a:prstGeom prst="rect">
+            <a:avLst/>
+          </a:prstGeom>
+          <a:noFill/>
+        </p:spPr>
+        <p:txBody>
+          <a:bodyPr wrap="square" anchor="t">
+            <a:spAutoFit/>
+          </a:bodyPr>
+          <a:lstStyle/>
+          <a:p>
+            <a:pPr algn="l"/>
+            <a:r>
+              <a:rPr sz="3000" b="1">
+                <a:solidFill>
+                  <a:srgbClr val="E2E8F0"/>
+                </a:solidFill>
+                <a:latin typeface="Segoe UI"/>
+              </a:rPr>
+              <a:t>Tests &amp; résultats</a:t>
+            </a:r>
+          </a:p>
+        </p:txBody>
+      </p:sp>
+      <p:sp>
+        <p:nvSpPr>
+          <p:cNvPr id="3" name="TextBox 2"/>
+          <p:cNvSpPr txBox="1"/>
+          <p:nvPr/>
+        </p:nvSpPr>
+        <p:spPr>
+          <a:xfrm>
+            <a:off x="548640" y="1207008"/>
+            <a:ext cx="1463040" cy="45720"/>
+          </a:xfrm>
+          <a:prstGeom prst="rect">
+            <a:avLst/>
+          </a:prstGeom>
+          <a:solidFill>
+            <a:srgbClr val="38BDF8"/>
+          </a:solidFill>
+          <a:ln>
+            <a:noFill/>
+          </a:ln>
+        </p:spPr>
+        <p:txBody>
+          <a:bodyPr wrap="none">
+            <a:spAutoFit/>
+          </a:bodyPr>
+          <a:lstStyle/>
+          <a:p/>
+        </p:txBody>
+      </p:sp>
+      <p:sp>
+        <p:nvSpPr>
+          <p:cNvPr id="4" name="TextBox 3"/>
+          <p:cNvSpPr txBox="1"/>
+          <p:nvPr/>
+        </p:nvSpPr>
+        <p:spPr>
+          <a:xfrm>
+            <a:off x="11338560" y="6446520"/>
+            <a:ext cx="640080" cy="274320"/>
+          </a:xfrm>
+          <a:prstGeom prst="rect">
+            <a:avLst/>
+          </a:prstGeom>
+          <a:noFill/>
+        </p:spPr>
+        <p:txBody>
+          <a:bodyPr wrap="square" anchor="t">
+            <a:spAutoFit/>
+          </a:bodyPr>
+          <a:lstStyle/>
+          <a:p>
+            <a:pPr algn="r"/>
+            <a:r>
+              <a:rPr sz="1100" b="0">
+                <a:solidFill>
+                  <a:srgbClr val="94A3B8"/>
+                </a:solidFill>
+                <a:latin typeface="Segoe UI"/>
+              </a:rPr>
+              <a:t>14</a:t>
+            </a:r>
+          </a:p>
+        </p:txBody>
+      </p:sp>
+      <p:sp>
+        <p:nvSpPr>
+          <p:cNvPr id="5" name="TextBox 4"/>
+          <p:cNvSpPr txBox="1"/>
+          <p:nvPr/>
+        </p:nvSpPr>
+        <p:spPr>
+          <a:xfrm>
+            <a:off x="640080" y="1645920"/>
+            <a:ext cx="2651760" cy="1371600"/>
+          </a:xfrm>
+          <a:prstGeom prst="rect">
+            <a:avLst/>
+          </a:prstGeom>
+          <a:solidFill>
+            <a:srgbClr val="1E293B"/>
+          </a:solidFill>
+          <a:ln>
+            <a:solidFill>
+              <a:srgbClr val="334155"/>
+            </a:solidFill>
+          </a:ln>
+        </p:spPr>
+        <p:txBody>
+          <a:bodyPr wrap="none">
+            <a:spAutoFit/>
+          </a:bodyPr>
+          <a:lstStyle/>
+          <a:p/>
+        </p:txBody>
+      </p:sp>
+      <p:sp>
+        <p:nvSpPr>
+          <p:cNvPr id="6" name="TextBox 5"/>
+          <p:cNvSpPr txBox="1"/>
+          <p:nvPr/>
+        </p:nvSpPr>
+        <p:spPr>
+          <a:xfrm>
+            <a:off x="640080" y="1828800"/>
+            <a:ext cx="2651760" cy="731520"/>
+          </a:xfrm>
+          <a:prstGeom prst="rect">
+            <a:avLst/>
+          </a:prstGeom>
+          <a:noFill/>
+        </p:spPr>
+        <p:txBody>
+          <a:bodyPr wrap="square" anchor="t">
+            <a:spAutoFit/>
+          </a:bodyPr>
+          <a:lstStyle/>
+          <a:p>
+            <a:pPr algn="ctr"/>
+            <a:r>
+              <a:rPr sz="3600" b="1">
+                <a:solidFill>
+                  <a:srgbClr val="38BDF8"/>
+                </a:solidFill>
+                <a:latin typeface="Segoe UI"/>
+              </a:rPr>
+              <a:t>52</a:t>
+            </a:r>
+          </a:p>
+        </p:txBody>
+      </p:sp>
+      <p:sp>
+        <p:nvSpPr>
+          <p:cNvPr id="7" name="TextBox 6"/>
+          <p:cNvSpPr txBox="1"/>
+          <p:nvPr/>
+        </p:nvSpPr>
+        <p:spPr>
+          <a:xfrm>
+            <a:off x="640080" y="2560320"/>
+            <a:ext cx="2651760" cy="365760"/>
+          </a:xfrm>
+          <a:prstGeom prst="rect">
+            <a:avLst/>
+          </a:prstGeom>
+          <a:noFill/>
+        </p:spPr>
+        <p:txBody>
+          <a:bodyPr wrap="square" anchor="t">
+            <a:spAutoFit/>
+          </a:bodyPr>
+          <a:lstStyle/>
+          <a:p>
+            <a:pPr algn="ctr"/>
+            <a:r>
+              <a:rPr sz="1300" b="0">
+                <a:solidFill>
+                  <a:srgbClr val="94A3B8"/>
+                </a:solidFill>
+                <a:latin typeface="Segoe UI"/>
+              </a:rPr>
+              <a:t>tests au vert</a:t>
+            </a:r>
+          </a:p>
+        </p:txBody>
+      </p:sp>
+      <p:sp>
+        <p:nvSpPr>
+          <p:cNvPr id="8" name="TextBox 7"/>
+          <p:cNvSpPr txBox="1"/>
+          <p:nvPr/>
+        </p:nvSpPr>
+        <p:spPr>
+          <a:xfrm>
+            <a:off x="3520439" y="1645920"/>
+            <a:ext cx="2651760" cy="1371600"/>
+          </a:xfrm>
+          <a:prstGeom prst="rect">
+            <a:avLst/>
+          </a:prstGeom>
+          <a:solidFill>
+            <a:srgbClr val="1E293B"/>
+          </a:solidFill>
+          <a:ln>
+            <a:solidFill>
+              <a:srgbClr val="334155"/>
+            </a:solidFill>
+          </a:ln>
+        </p:spPr>
+        <p:txBody>
+          <a:bodyPr wrap="none">
+            <a:spAutoFit/>
+          </a:bodyPr>
+          <a:lstStyle/>
+          <a:p/>
+        </p:txBody>
+      </p:sp>
+      <p:sp>
+        <p:nvSpPr>
+          <p:cNvPr id="9" name="TextBox 8"/>
+          <p:cNvSpPr txBox="1"/>
+          <p:nvPr/>
+        </p:nvSpPr>
+        <p:spPr>
+          <a:xfrm>
+            <a:off x="3520439" y="1828800"/>
+            <a:ext cx="2651760" cy="731520"/>
+          </a:xfrm>
+          <a:prstGeom prst="rect">
+            <a:avLst/>
+          </a:prstGeom>
+          <a:noFill/>
+        </p:spPr>
+        <p:txBody>
+          <a:bodyPr wrap="square" anchor="t">
+            <a:spAutoFit/>
+          </a:bodyPr>
+          <a:lstStyle/>
+          <a:p>
+            <a:pPr algn="ctr"/>
+            <a:r>
+              <a:rPr sz="3600" b="1">
+                <a:solidFill>
+                  <a:srgbClr val="38BDF8"/>
+                </a:solidFill>
+                <a:latin typeface="Segoe UI"/>
+              </a:rPr>
+              <a:t>0</a:t>
+            </a:r>
+          </a:p>
+        </p:txBody>
+      </p:sp>
+      <p:sp>
+        <p:nvSpPr>
+          <p:cNvPr id="10" name="TextBox 9"/>
+          <p:cNvSpPr txBox="1"/>
+          <p:nvPr/>
+        </p:nvSpPr>
+        <p:spPr>
+          <a:xfrm>
+            <a:off x="3520439" y="2560320"/>
+            <a:ext cx="2651760" cy="365760"/>
+          </a:xfrm>
+          <a:prstGeom prst="rect">
+            <a:avLst/>
+          </a:prstGeom>
+          <a:noFill/>
+        </p:spPr>
+        <p:txBody>
+          <a:bodyPr wrap="square" anchor="t">
+            <a:spAutoFit/>
+          </a:bodyPr>
+          <a:lstStyle/>
+          <a:p>
+            <a:pPr algn="ctr"/>
+            <a:r>
+              <a:rPr sz="1300" b="0">
+                <a:solidFill>
+                  <a:srgbClr val="94A3B8"/>
+                </a:solidFill>
+                <a:latin typeface="Segoe UI"/>
+              </a:rPr>
+              <a:t>échec / erreur</a:t>
+            </a:r>
+          </a:p>
+        </p:txBody>
+      </p:sp>
+      <p:sp>
+        <p:nvSpPr>
+          <p:cNvPr id="11" name="TextBox 10"/>
+          <p:cNvSpPr txBox="1"/>
+          <p:nvPr/>
+        </p:nvSpPr>
+        <p:spPr>
+          <a:xfrm>
+            <a:off x="6400800" y="1645920"/>
+            <a:ext cx="2651760" cy="1371600"/>
+          </a:xfrm>
+          <a:prstGeom prst="rect">
+            <a:avLst/>
+          </a:prstGeom>
+          <a:solidFill>
+            <a:srgbClr val="1E293B"/>
+          </a:solidFill>
+          <a:ln>
+            <a:solidFill>
+              <a:srgbClr val="334155"/>
+            </a:solidFill>
+          </a:ln>
+        </p:spPr>
+        <p:txBody>
+          <a:bodyPr wrap="none">
+            <a:spAutoFit/>
+          </a:bodyPr>
+          <a:lstStyle/>
+          <a:p/>
+        </p:txBody>
+      </p:sp>
+      <p:sp>
+        <p:nvSpPr>
+          <p:cNvPr id="12" name="TextBox 11"/>
+          <p:cNvSpPr txBox="1"/>
+          <p:nvPr/>
+        </p:nvSpPr>
+        <p:spPr>
+          <a:xfrm>
+            <a:off x="6400800" y="1828800"/>
+            <a:ext cx="2651760" cy="731520"/>
+          </a:xfrm>
+          <a:prstGeom prst="rect">
+            <a:avLst/>
+          </a:prstGeom>
+          <a:noFill/>
+        </p:spPr>
+        <p:txBody>
+          <a:bodyPr wrap="square" anchor="t">
+            <a:spAutoFit/>
+          </a:bodyPr>
+          <a:lstStyle/>
+          <a:p>
+            <a:pPr algn="ctr"/>
+            <a:r>
+              <a:rPr sz="3600" b="1">
+                <a:solidFill>
+                  <a:srgbClr val="38BDF8"/>
+                </a:solidFill>
+                <a:latin typeface="Segoe UI"/>
+              </a:rPr>
+              <a:t>13</a:t>
+            </a:r>
+          </a:p>
+        </p:txBody>
+      </p:sp>
+      <p:sp>
+        <p:nvSpPr>
+          <p:cNvPr id="13" name="TextBox 12"/>
+          <p:cNvSpPr txBox="1"/>
+          <p:nvPr/>
+        </p:nvSpPr>
+        <p:spPr>
+          <a:xfrm>
+            <a:off x="6400800" y="2560320"/>
+            <a:ext cx="2651760" cy="365760"/>
+          </a:xfrm>
+          <a:prstGeom prst="rect">
+            <a:avLst/>
+          </a:prstGeom>
+          <a:noFill/>
+        </p:spPr>
+        <p:txBody>
+          <a:bodyPr wrap="square" anchor="t">
+            <a:spAutoFit/>
+          </a:bodyPr>
+          <a:lstStyle/>
+          <a:p>
+            <a:pPr algn="ctr"/>
+            <a:r>
+              <a:rPr sz="1300" b="0">
+                <a:solidFill>
+                  <a:srgbClr val="94A3B8"/>
+                </a:solidFill>
+                <a:latin typeface="Segoe UI"/>
+              </a:rPr>
+              <a:t>conteneurs</a:t>
+            </a:r>
+          </a:p>
+        </p:txBody>
+      </p:sp>
+      <p:sp>
+        <p:nvSpPr>
+          <p:cNvPr id="14" name="TextBox 13"/>
+          <p:cNvSpPr txBox="1"/>
+          <p:nvPr/>
+        </p:nvSpPr>
+        <p:spPr>
+          <a:xfrm>
+            <a:off x="9281159" y="1645920"/>
+            <a:ext cx="2651760" cy="1371600"/>
+          </a:xfrm>
+          <a:prstGeom prst="rect">
+            <a:avLst/>
+          </a:prstGeom>
+          <a:solidFill>
+            <a:srgbClr val="1E293B"/>
+          </a:solidFill>
+          <a:ln>
+            <a:solidFill>
+              <a:srgbClr val="334155"/>
+            </a:solidFill>
+          </a:ln>
+        </p:spPr>
+        <p:txBody>
+          <a:bodyPr wrap="none">
+            <a:spAutoFit/>
+          </a:bodyPr>
+          <a:lstStyle/>
+          <a:p/>
+        </p:txBody>
+      </p:sp>
+      <p:sp>
+        <p:nvSpPr>
+          <p:cNvPr id="15" name="TextBox 14"/>
+          <p:cNvSpPr txBox="1"/>
+          <p:nvPr/>
+        </p:nvSpPr>
+        <p:spPr>
+          <a:xfrm>
+            <a:off x="9281159" y="1828800"/>
+            <a:ext cx="2651760" cy="731520"/>
+          </a:xfrm>
+          <a:prstGeom prst="rect">
+            <a:avLst/>
+          </a:prstGeom>
+          <a:noFill/>
+        </p:spPr>
+        <p:txBody>
+          <a:bodyPr wrap="square" anchor="t">
+            <a:spAutoFit/>
+          </a:bodyPr>
+          <a:lstStyle/>
+          <a:p>
+            <a:pPr algn="ctr"/>
+            <a:r>
+              <a:rPr sz="3600" b="1">
+                <a:solidFill>
+                  <a:srgbClr val="38BDF8"/>
+                </a:solidFill>
+                <a:latin typeface="Segoe UI"/>
+              </a:rPr>
+              <a:t>7/7</a:t>
+            </a:r>
+          </a:p>
+        </p:txBody>
+      </p:sp>
+      <p:sp>
+        <p:nvSpPr>
+          <p:cNvPr id="16" name="TextBox 15"/>
+          <p:cNvSpPr txBox="1"/>
+          <p:nvPr/>
+        </p:nvSpPr>
+        <p:spPr>
+          <a:xfrm>
+            <a:off x="9281159" y="2560320"/>
+            <a:ext cx="2651760" cy="365760"/>
+          </a:xfrm>
+          <a:prstGeom prst="rect">
+            <a:avLst/>
+          </a:prstGeom>
+          <a:noFill/>
+        </p:spPr>
+        <p:txBody>
+          <a:bodyPr wrap="square" anchor="t">
+            <a:spAutoFit/>
+          </a:bodyPr>
+          <a:lstStyle/>
+          <a:p>
+            <a:pPr algn="ctr"/>
+            <a:r>
+              <a:rPr sz="1300" b="0">
+                <a:solidFill>
+                  <a:srgbClr val="94A3B8"/>
+                </a:solidFill>
+                <a:latin typeface="Segoe UI"/>
+              </a:rPr>
+              <a:t>cibles Prometheus</a:t>
+            </a:r>
+          </a:p>
+        </p:txBody>
+      </p:sp>
       <p:graphicFrame>
         <p:nvGraphicFramePr>
-          <p:cNvPr id="6" name="Table 5"/>
+          <p:cNvPr id="17" name="Table 16"/>
           <p:cNvGraphicFramePr>
             <a:graphicFrameLocks noGrp="1"/>
           </p:cNvGraphicFramePr>
           <p:nvPr/>
         </p:nvGraphicFramePr>
         <p:xfrm>
-          <a:off x="640080" y="1645920"/>
-          <a:ext cx="10972800" cy="2194560"/>
+          <a:off x="640080" y="3291840"/>
+          <a:ext cx="10972800" cy="1463040"/>
         </p:xfrm>
         <a:graphic>
           <a:graphicData uri="http://schemas.openxmlformats.org/drawingml/2006/table">
@@ -5252,9 +5867,9 @@
                 <a:tableStyleId>{5C22544A-7EE6-4342-B048-85BDC9FD1C3A}</a:tableStyleId>
               </a:tblPr>
               <a:tblGrid>
-                <a:gridCol w="2011680"/>
-                <a:gridCol w="3017520"/>
                 <a:gridCol w="5943600"/>
+                <a:gridCol w="2286000"/>
+                <a:gridCol w="2743200"/>
               </a:tblGrid>
               <a:tr h="365760">
                 <a:tc>
@@ -5270,6 +5885,500 @@
                           <a:latin typeface="Segoe UI"/>
                         </a:rPr>
                         <a:t>Service</a:t>
+                      </a:r>
+                    </a:p>
+                  </a:txBody>
+                  <a:tcPr marL="73152" marR="73152" marT="27432" marB="27432">
+                    <a:solidFill>
+                      <a:srgbClr val="24344D"/>
+                    </a:solidFill>
+                  </a:tcPr>
+                </a:tc>
+                <a:tc>
+                  <a:txBody>
+                    <a:bodyPr/>
+                    <a:lstStyle/>
+                    <a:p>
+                      <a:r>
+                        <a:rPr sz="1400" b="1">
+                          <a:solidFill>
+                            <a:srgbClr val="38BDF8"/>
+                          </a:solidFill>
+                          <a:latin typeface="Segoe UI"/>
+                        </a:rPr>
+                        <a:t>Tests</a:t>
+                      </a:r>
+                    </a:p>
+                  </a:txBody>
+                  <a:tcPr marL="73152" marR="73152" marT="27432" marB="27432">
+                    <a:solidFill>
+                      <a:srgbClr val="24344D"/>
+                    </a:solidFill>
+                  </a:tcPr>
+                </a:tc>
+                <a:tc>
+                  <a:txBody>
+                    <a:bodyPr/>
+                    <a:lstStyle/>
+                    <a:p>
+                      <a:r>
+                        <a:rPr sz="1400" b="1">
+                          <a:solidFill>
+                            <a:srgbClr val="38BDF8"/>
+                          </a:solidFill>
+                          <a:latin typeface="Segoe UI"/>
+                        </a:rPr>
+                        <a:t>Résultat</a:t>
+                      </a:r>
+                    </a:p>
+                  </a:txBody>
+                  <a:tcPr marL="73152" marR="73152" marT="27432" marB="27432">
+                    <a:solidFill>
+                      <a:srgbClr val="24344D"/>
+                    </a:solidFill>
+                  </a:tcPr>
+                </a:tc>
+              </a:tr>
+              <a:tr h="365760">
+                <a:tc>
+                  <a:txBody>
+                    <a:bodyPr/>
+                    <a:lstStyle/>
+                    <a:p>
+                      <a:r>
+                        <a:rPr sz="1400" b="0">
+                          <a:solidFill>
+                            <a:srgbClr val="E2E8F0"/>
+                          </a:solidFill>
+                          <a:latin typeface="Segoe UI"/>
+                        </a:rPr>
+                        <a:t>product-service / customer-service</a:t>
+                      </a:r>
+                    </a:p>
+                  </a:txBody>
+                  <a:tcPr marL="73152" marR="73152" marT="27432" marB="27432">
+                    <a:solidFill>
+                      <a:srgbClr val="1E293B"/>
+                    </a:solidFill>
+                  </a:tcPr>
+                </a:tc>
+                <a:tc>
+                  <a:txBody>
+                    <a:bodyPr/>
+                    <a:lstStyle/>
+                    <a:p>
+                      <a:r>
+                        <a:rPr sz="1400" b="0">
+                          <a:solidFill>
+                            <a:srgbClr val="E2E8F0"/>
+                          </a:solidFill>
+                          <a:latin typeface="Segoe UI"/>
+                        </a:rPr>
+                        <a:t>12 / 9</a:t>
+                      </a:r>
+                    </a:p>
+                  </a:txBody>
+                  <a:tcPr marL="73152" marR="73152" marT="27432" marB="27432">
+                    <a:solidFill>
+                      <a:srgbClr val="1E293B"/>
+                    </a:solidFill>
+                  </a:tcPr>
+                </a:tc>
+                <a:tc>
+                  <a:txBody>
+                    <a:bodyPr/>
+                    <a:lstStyle/>
+                    <a:p>
+                      <a:r>
+                        <a:rPr sz="1400" b="0">
+                          <a:solidFill>
+                            <a:srgbClr val="E2E8F0"/>
+                          </a:solidFill>
+                          <a:latin typeface="Segoe UI"/>
+                        </a:rPr>
+                        <a:t>OK</a:t>
+                      </a:r>
+                    </a:p>
+                  </a:txBody>
+                  <a:tcPr marL="73152" marR="73152" marT="27432" marB="27432">
+                    <a:solidFill>
+                      <a:srgbClr val="1E293B"/>
+                    </a:solidFill>
+                  </a:tcPr>
+                </a:tc>
+              </a:tr>
+              <a:tr h="365760">
+                <a:tc>
+                  <a:txBody>
+                    <a:bodyPr/>
+                    <a:lstStyle/>
+                    <a:p>
+                      <a:r>
+                        <a:rPr sz="1400" b="0">
+                          <a:solidFill>
+                            <a:srgbClr val="E2E8F0"/>
+                          </a:solidFill>
+                          <a:latin typeface="Segoe UI"/>
+                        </a:rPr>
+                        <a:t>cart-service / order-service</a:t>
+                      </a:r>
+                    </a:p>
+                  </a:txBody>
+                  <a:tcPr marL="73152" marR="73152" marT="27432" marB="27432">
+                    <a:solidFill>
+                      <a:srgbClr val="1E293B"/>
+                    </a:solidFill>
+                  </a:tcPr>
+                </a:tc>
+                <a:tc>
+                  <a:txBody>
+                    <a:bodyPr/>
+                    <a:lstStyle/>
+                    <a:p>
+                      <a:r>
+                        <a:rPr sz="1400" b="0">
+                          <a:solidFill>
+                            <a:srgbClr val="E2E8F0"/>
+                          </a:solidFill>
+                          <a:latin typeface="Segoe UI"/>
+                        </a:rPr>
+                        <a:t>13 / 12</a:t>
+                      </a:r>
+                    </a:p>
+                  </a:txBody>
+                  <a:tcPr marL="73152" marR="73152" marT="27432" marB="27432">
+                    <a:solidFill>
+                      <a:srgbClr val="1E293B"/>
+                    </a:solidFill>
+                  </a:tcPr>
+                </a:tc>
+                <a:tc>
+                  <a:txBody>
+                    <a:bodyPr/>
+                    <a:lstStyle/>
+                    <a:p>
+                      <a:r>
+                        <a:rPr sz="1400" b="0">
+                          <a:solidFill>
+                            <a:srgbClr val="E2E8F0"/>
+                          </a:solidFill>
+                          <a:latin typeface="Segoe UI"/>
+                        </a:rPr>
+                        <a:t>OK</a:t>
+                      </a:r>
+                    </a:p>
+                  </a:txBody>
+                  <a:tcPr marL="73152" marR="73152" marT="27432" marB="27432">
+                    <a:solidFill>
+                      <a:srgbClr val="1E293B"/>
+                    </a:solidFill>
+                  </a:tcPr>
+                </a:tc>
+              </a:tr>
+              <a:tr h="365760">
+                <a:tc>
+                  <a:txBody>
+                    <a:bodyPr/>
+                    <a:lstStyle/>
+                    <a:p>
+                      <a:r>
+                        <a:rPr sz="1400" b="0">
+                          <a:solidFill>
+                            <a:srgbClr val="E2E8F0"/>
+                          </a:solidFill>
+                          <a:latin typeface="Segoe UI"/>
+                        </a:rPr>
+                        <a:t>api-gateway</a:t>
+                      </a:r>
+                    </a:p>
+                  </a:txBody>
+                  <a:tcPr marL="73152" marR="73152" marT="27432" marB="27432">
+                    <a:solidFill>
+                      <a:srgbClr val="1E293B"/>
+                    </a:solidFill>
+                  </a:tcPr>
+                </a:tc>
+                <a:tc>
+                  <a:txBody>
+                    <a:bodyPr/>
+                    <a:lstStyle/>
+                    <a:p>
+                      <a:r>
+                        <a:rPr sz="1400" b="0">
+                          <a:solidFill>
+                            <a:srgbClr val="E2E8F0"/>
+                          </a:solidFill>
+                          <a:latin typeface="Segoe UI"/>
+                        </a:rPr>
+                        <a:t>6</a:t>
+                      </a:r>
+                    </a:p>
+                  </a:txBody>
+                  <a:tcPr marL="73152" marR="73152" marT="27432" marB="27432">
+                    <a:solidFill>
+                      <a:srgbClr val="1E293B"/>
+                    </a:solidFill>
+                  </a:tcPr>
+                </a:tc>
+                <a:tc>
+                  <a:txBody>
+                    <a:bodyPr/>
+                    <a:lstStyle/>
+                    <a:p>
+                      <a:r>
+                        <a:rPr sz="1400" b="0">
+                          <a:solidFill>
+                            <a:srgbClr val="E2E8F0"/>
+                          </a:solidFill>
+                          <a:latin typeface="Segoe UI"/>
+                        </a:rPr>
+                        <a:t>OK</a:t>
+                      </a:r>
+                    </a:p>
+                  </a:txBody>
+                  <a:tcPr marL="73152" marR="73152" marT="27432" marB="27432">
+                    <a:solidFill>
+                      <a:srgbClr val="1E293B"/>
+                    </a:solidFill>
+                  </a:tcPr>
+                </a:tc>
+              </a:tr>
+            </a:tbl>
+          </a:graphicData>
+        </a:graphic>
+      </p:graphicFrame>
+      <p:sp>
+        <p:nvSpPr>
+          <p:cNvPr id="18" name="TextBox 17"/>
+          <p:cNvSpPr txBox="1"/>
+          <p:nvPr/>
+        </p:nvSpPr>
+        <p:spPr>
+          <a:xfrm>
+            <a:off x="640080" y="5852160"/>
+            <a:ext cx="10972800" cy="457200"/>
+          </a:xfrm>
+          <a:prstGeom prst="rect">
+            <a:avLst/>
+          </a:prstGeom>
+          <a:noFill/>
+        </p:spPr>
+        <p:txBody>
+          <a:bodyPr wrap="square" anchor="t">
+            <a:spAutoFit/>
+          </a:bodyPr>
+          <a:lstStyle/>
+          <a:p>
+            <a:pPr algn="l"/>
+            <a:r>
+              <a:rPr sz="1400" b="0">
+                <a:solidFill>
+                  <a:srgbClr val="94A3B8"/>
+                </a:solidFill>
+                <a:latin typeface="Segoe UI"/>
+              </a:rPr>
+              <a:t>Tests sur bases isolées (postgres-test + mongo-test) ; parcours API, sécurité (401/403/200) et contraintes de base.</a:t>
+            </a:r>
+          </a:p>
+        </p:txBody>
+      </p:sp>
+    </p:spTree>
+  </p:cSld>
+  <p:clrMapOvr>
+    <a:masterClrMapping/>
+  </p:clrMapOvr>
+</p:sld>
+</file>
+
+<file path=ppt/slides/slide16.xml><?xml version="1.0" encoding="utf-8"?>
+<p:sld xmlns:a="http://schemas.openxmlformats.org/drawingml/2006/main" xmlns:p="http://schemas.openxmlformats.org/presentationml/2006/main" xmlns:r="http://schemas.openxmlformats.org/officeDocument/2006/relationships">
+  <p:cSld>
+    <p:bg>
+      <p:bgPr>
+        <a:solidFill>
+          <a:srgbClr val="0F172A"/>
+        </a:solidFill>
+        <a:effectLst/>
+      </p:bgPr>
+    </p:bg>
+    <p:spTree>
+      <p:nvGrpSpPr>
+        <p:cNvPr id="1" name=""/>
+        <p:cNvGrpSpPr/>
+        <p:nvPr/>
+      </p:nvGrpSpPr>
+      <p:grpSpPr/>
+      <p:sp>
+        <p:nvSpPr>
+          <p:cNvPr id="2" name="TextBox 1"/>
+          <p:cNvSpPr txBox="1"/>
+          <p:nvPr/>
+        </p:nvSpPr>
+        <p:spPr>
+          <a:xfrm>
+            <a:off x="548640" y="292608"/>
+            <a:ext cx="11064240" cy="731520"/>
+          </a:xfrm>
+          <a:prstGeom prst="rect">
+            <a:avLst/>
+          </a:prstGeom>
+          <a:noFill/>
+        </p:spPr>
+        <p:txBody>
+          <a:bodyPr wrap="square" anchor="t">
+            <a:spAutoFit/>
+          </a:bodyPr>
+          <a:lstStyle/>
+          <a:p>
+            <a:pPr algn="l"/>
+            <a:r>
+              <a:rPr sz="3000" b="1">
+                <a:solidFill>
+                  <a:srgbClr val="E2E8F0"/>
+                </a:solidFill>
+                <a:latin typeface="Segoe UI"/>
+              </a:rPr>
+              <a:t>Résultats de la pile complète</a:t>
+            </a:r>
+          </a:p>
+        </p:txBody>
+      </p:sp>
+      <p:sp>
+        <p:nvSpPr>
+          <p:cNvPr id="3" name="TextBox 2"/>
+          <p:cNvSpPr txBox="1"/>
+          <p:nvPr/>
+        </p:nvSpPr>
+        <p:spPr>
+          <a:xfrm>
+            <a:off x="548640" y="914400"/>
+            <a:ext cx="11064240" cy="365760"/>
+          </a:xfrm>
+          <a:prstGeom prst="rect">
+            <a:avLst/>
+          </a:prstGeom>
+          <a:noFill/>
+        </p:spPr>
+        <p:txBody>
+          <a:bodyPr wrap="square" anchor="t">
+            <a:spAutoFit/>
+          </a:bodyPr>
+          <a:lstStyle/>
+          <a:p>
+            <a:pPr algn="l"/>
+            <a:r>
+              <a:rPr sz="1400" b="0">
+                <a:solidFill>
+                  <a:srgbClr val="94A3B8"/>
+                </a:solidFill>
+                <a:latin typeface="Segoe UI"/>
+              </a:rPr>
+              <a:t>Vérifié en conditions réelles</a:t>
+            </a:r>
+          </a:p>
+        </p:txBody>
+      </p:sp>
+      <p:sp>
+        <p:nvSpPr>
+          <p:cNvPr id="4" name="TextBox 3"/>
+          <p:cNvSpPr txBox="1"/>
+          <p:nvPr/>
+        </p:nvSpPr>
+        <p:spPr>
+          <a:xfrm>
+            <a:off x="548640" y="1207008"/>
+            <a:ext cx="1463040" cy="45720"/>
+          </a:xfrm>
+          <a:prstGeom prst="rect">
+            <a:avLst/>
+          </a:prstGeom>
+          <a:solidFill>
+            <a:srgbClr val="38BDF8"/>
+          </a:solidFill>
+          <a:ln>
+            <a:noFill/>
+          </a:ln>
+        </p:spPr>
+        <p:txBody>
+          <a:bodyPr wrap="none">
+            <a:spAutoFit/>
+          </a:bodyPr>
+          <a:lstStyle/>
+          <a:p/>
+        </p:txBody>
+      </p:sp>
+      <p:sp>
+        <p:nvSpPr>
+          <p:cNvPr id="5" name="TextBox 4"/>
+          <p:cNvSpPr txBox="1"/>
+          <p:nvPr/>
+        </p:nvSpPr>
+        <p:spPr>
+          <a:xfrm>
+            <a:off x="11338560" y="6446520"/>
+            <a:ext cx="640080" cy="274320"/>
+          </a:xfrm>
+          <a:prstGeom prst="rect">
+            <a:avLst/>
+          </a:prstGeom>
+          <a:noFill/>
+        </p:spPr>
+        <p:txBody>
+          <a:bodyPr wrap="square" anchor="t">
+            <a:spAutoFit/>
+          </a:bodyPr>
+          <a:lstStyle/>
+          <a:p>
+            <a:pPr algn="r"/>
+            <a:r>
+              <a:rPr sz="1100" b="0">
+                <a:solidFill>
+                  <a:srgbClr val="94A3B8"/>
+                </a:solidFill>
+                <a:latin typeface="Segoe UI"/>
+              </a:rPr>
+              <a:t>15</a:t>
+            </a:r>
+          </a:p>
+        </p:txBody>
+      </p:sp>
+      <p:graphicFrame>
+        <p:nvGraphicFramePr>
+          <p:cNvPr id="6" name="Table 5"/>
+          <p:cNvGraphicFramePr>
+            <a:graphicFrameLocks noGrp="1"/>
+          </p:cNvGraphicFramePr>
+          <p:nvPr/>
+        </p:nvGraphicFramePr>
+        <p:xfrm>
+          <a:off x="640080" y="1645920"/>
+          <a:ext cx="10972800" cy="2194560"/>
+        </p:xfrm>
+        <a:graphic>
+          <a:graphicData uri="http://schemas.openxmlformats.org/drawingml/2006/table">
+            <a:tbl>
+              <a:tblPr firstRow="1" bandRow="1">
+                <a:tableStyleId>{5C22544A-7EE6-4342-B048-85BDC9FD1C3A}</a:tableStyleId>
+              </a:tblPr>
+              <a:tblGrid>
+                <a:gridCol w="2194560"/>
+                <a:gridCol w="3840480"/>
+                <a:gridCol w="4937760"/>
+              </a:tblGrid>
+              <a:tr h="365760">
+                <a:tc>
+                  <a:txBody>
+                    <a:bodyPr/>
+                    <a:lstStyle/>
+                    <a:p>
+                      <a:r>
+                        <a:rPr sz="1400" b="1">
+                          <a:solidFill>
+                            <a:srgbClr val="38BDF8"/>
+                          </a:solidFill>
+                          <a:latin typeface="Segoe UI"/>
+                        </a:rPr>
+                        <a:t>Élément</a:t>
                       </a:r>
                     </a:p>
                   </a:txBody>
@@ -5337,7 +6446,7 @@
                           </a:solidFill>
                           <a:latin typeface="Segoe UI"/>
                         </a:rPr>
-                        <a:t>Application</a:t>
+                        <a:t>Boutique</a:t>
                       </a:r>
                     </a:p>
                   </a:txBody>
@@ -5359,7 +6468,7 @@
                           </a:solidFill>
                           <a:latin typeface="Segoe UI"/>
                         </a:rPr>
-                        <a:t>127.0.0.1:8000</a:t>
+                        <a:t>localhost:5173</a:t>
                       </a:r>
                     </a:p>
                   </a:txBody>
@@ -5381,7 +6490,7 @@
                           </a:solidFill>
                           <a:latin typeface="Segoe UI"/>
                         </a:rPr>
-                        <a:t>/healthz → {status: ok, db: up} · données affichées</a:t>
+                        <a:t>SPA servie, connexion Keycloak, données affichées</a:t>
                       </a:r>
                     </a:p>
                   </a:txBody>
@@ -5405,7 +6514,7 @@
                           </a:solidFill>
                           <a:latin typeface="Segoe UI"/>
                         </a:rPr>
-                        <a:t>API Swagger</a:t>
+                        <a:t>API produits</a:t>
                       </a:r>
                     </a:p>
                   </a:txBody>
@@ -5427,7 +6536,7 @@
                           </a:solidFill>
                           <a:latin typeface="Segoe UI"/>
                         </a:rPr>
-                        <a:t>127.0.0.1:8000/api/docs</a:t>
+                        <a:t>localhost:8090/api/products</a:t>
                       </a:r>
                     </a:p>
                   </a:txBody>
@@ -5449,7 +6558,75 @@
                           </a:solidFill>
                           <a:latin typeface="Segoe UI"/>
                         </a:rPr>
-                        <a:t>Schéma OpenAPI généré automatiquement</a:t>
+                        <a:t>200 public · CRUD réservé ADMIN</a:t>
+                      </a:r>
+                    </a:p>
+                  </a:txBody>
+                  <a:tcPr marL="73152" marR="73152" marT="27432" marB="27432">
+                    <a:solidFill>
+                      <a:srgbClr val="1E293B"/>
+                    </a:solidFill>
+                  </a:tcPr>
+                </a:tc>
+              </a:tr>
+              <a:tr h="365760">
+                <a:tc>
+                  <a:txBody>
+                    <a:bodyPr/>
+                    <a:lstStyle/>
+                    <a:p>
+                      <a:r>
+                        <a:rPr sz="1400" b="0">
+                          <a:solidFill>
+                            <a:srgbClr val="E2E8F0"/>
+                          </a:solidFill>
+                          <a:latin typeface="Segoe UI"/>
+                        </a:rPr>
+                        <a:t>Sécurité</a:t>
+                      </a:r>
+                    </a:p>
+                  </a:txBody>
+                  <a:tcPr marL="73152" marR="73152" marT="27432" marB="27432">
+                    <a:solidFill>
+                      <a:srgbClr val="1E293B"/>
+                    </a:solidFill>
+                  </a:tcPr>
+                </a:tc>
+                <a:tc>
+                  <a:txBody>
+                    <a:bodyPr/>
+                    <a:lstStyle/>
+                    <a:p>
+                      <a:r>
+                        <a:rPr sz="1400" b="0">
+                          <a:solidFill>
+                            <a:srgbClr val="E2E8F0"/>
+                          </a:solidFill>
+                          <a:latin typeface="Segoe UI"/>
+                        </a:rPr>
+                        <a:t>localhost:8181 (Keycloak)</a:t>
+                      </a:r>
+                    </a:p>
+                  </a:txBody>
+                  <a:tcPr marL="73152" marR="73152" marT="27432" marB="27432">
+                    <a:solidFill>
+                      <a:srgbClr val="1E293B"/>
+                    </a:solidFill>
+                  </a:tcPr>
+                </a:tc>
+                <a:tc>
+                  <a:txBody>
+                    <a:bodyPr/>
+                    <a:lstStyle/>
+                    <a:p>
+                      <a:r>
+                        <a:rPr sz="1400" b="0">
+                          <a:solidFill>
+                            <a:srgbClr val="E2E8F0"/>
+                          </a:solidFill>
+                          <a:latin typeface="Segoe UI"/>
+                        </a:rPr>
+                        <a:t>jetons JWT · matrice 401/403/200</a:t>
                       </a:r>
                     </a:p>
                   </a:txBody>
@@ -5495,7 +6672,7 @@
                           </a:solidFill>
                           <a:latin typeface="Segoe UI"/>
                         </a:rPr>
-                        <a:t>127.0.0.1:9090</a:t>
+                        <a:t>localhost:9090</a:t>
                       </a:r>
                     </a:p>
                   </a:txBody>
@@ -5517,7 +6694,7 @@
                           </a:solidFill>
                           <a:latin typeface="Segoe UI"/>
                         </a:rPr>
-                        <a:t>Cible pfe-flow : state = up · échantillons collectés</a:t>
+                        <a:t>7/7 cibles up · échantillons collectés</a:t>
                       </a:r>
                     </a:p>
                   </a:txBody>
@@ -5563,7 +6740,7 @@
                           </a:solidFill>
                           <a:latin typeface="Segoe UI"/>
                         </a:rPr>
-                        <a:t>127.0.0.1:3000</a:t>
+                        <a:t>localhost:3000</a:t>
                       </a:r>
                     </a:p>
                   </a:txBody>
@@ -5585,75 +6762,7 @@
                           </a:solidFill>
                           <a:latin typeface="Segoe UI"/>
                         </a:rPr>
-                        <a:t>Dashboard « PFE Flow — Observabilité » provisionné</a:t>
-                      </a:r>
-                    </a:p>
-                  </a:txBody>
-                  <a:tcPr marL="73152" marR="73152" marT="27432" marB="27432">
-                    <a:solidFill>
-                      <a:srgbClr val="1E293B"/>
-                    </a:solidFill>
-                  </a:tcPr>
-                </a:tc>
-              </a:tr>
-              <a:tr h="365760">
-                <a:tc>
-                  <a:txBody>
-                    <a:bodyPr/>
-                    <a:lstStyle/>
-                    <a:p>
-                      <a:r>
-                        <a:rPr sz="1400" b="0">
-                          <a:solidFill>
-                            <a:srgbClr val="E2E8F0"/>
-                          </a:solidFill>
-                          <a:latin typeface="Segoe UI"/>
-                        </a:rPr>
-                        <a:t>CI/CD</a:t>
-                      </a:r>
-                    </a:p>
-                  </a:txBody>
-                  <a:tcPr marL="73152" marR="73152" marT="27432" marB="27432">
-                    <a:solidFill>
-                      <a:srgbClr val="1E293B"/>
-                    </a:solidFill>
-                  </a:tcPr>
-                </a:tc>
-                <a:tc>
-                  <a:txBody>
-                    <a:bodyPr/>
-                    <a:lstStyle/>
-                    <a:p>
-                      <a:r>
-                        <a:rPr sz="1400" b="0">
-                          <a:solidFill>
-                            <a:srgbClr val="E2E8F0"/>
-                          </a:solidFill>
-                          <a:latin typeface="Segoe UI"/>
-                        </a:rPr>
-                        <a:t>GitHub Actions</a:t>
-                      </a:r>
-                    </a:p>
-                  </a:txBody>
-                  <a:tcPr marL="73152" marR="73152" marT="27432" marB="27432">
-                    <a:solidFill>
-                      <a:srgbClr val="1E293B"/>
-                    </a:solidFill>
-                  </a:tcPr>
-                </a:tc>
-                <a:tc>
-                  <a:txBody>
-                    <a:bodyPr/>
-                    <a:lstStyle/>
-                    <a:p>
-                      <a:r>
-                        <a:rPr sz="1400" b="0">
-                          <a:solidFill>
-                            <a:srgbClr val="E2E8F0"/>
-                          </a:solidFill>
-                          <a:latin typeface="Segoe UI"/>
-                        </a:rPr>
-                        <a:t>quality → docker (GHCR, Trivy) → deploy (conditionnel)</a:t>
+                        <a:t>dashboard pfe-ecom-overview (11 panneaux)</a:t>
                       </a:r>
                     </a:p>
                   </a:txBody>
@@ -5676,7 +6785,7 @@
         </p:nvSpPr>
         <p:spPr>
           <a:xfrm>
-            <a:off x="640080" y="4572000"/>
+            <a:off x="640080" y="4663440"/>
             <a:ext cx="10972800" cy="1828800"/>
           </a:xfrm>
           <a:prstGeom prst="rect">
@@ -5696,7 +6805,7 @@
               </a:spcAft>
             </a:pPr>
             <a:r>
-              <a:rPr b="1" sz="1600">
+              <a:rPr b="1" sz="1500">
                 <a:solidFill>
                   <a:srgbClr val="38BDF8"/>
                 </a:solidFill>
@@ -5705,13 +6814,13 @@
               <a:t>• Reproductibilité</a:t>
             </a:r>
             <a:r>
-              <a:rPr sz="1600">
+              <a:rPr sz="1500">
                 <a:solidFill>
                   <a:srgbClr val="E2E8F0"/>
                 </a:solidFill>
                 <a:latin typeface="Segoe UI"/>
               </a:rPr>
-              <a:t> une commande : docker compose --profile observability up -d --build</a:t>
+              <a:t> docker compose -f docker-compose.ecom.yml up -d --build (13 sains)</a:t>
             </a:r>
           </a:p>
           <a:p>
@@ -5721,22 +6830,22 @@
               </a:spcAft>
             </a:pPr>
             <a:r>
-              <a:rPr b="1" sz="1600">
+              <a:rPr b="1" sz="1500">
                 <a:solidFill>
                   <a:srgbClr val="38BDF8"/>
                 </a:solidFill>
                 <a:latin typeface="Segoe UI"/>
               </a:rPr>
-              <a:t>• Hors-ligne</a:t>
-            </a:r>
-            <a:r>
-              <a:rPr sz="1600">
+              <a:t>• Persistance</a:t>
+            </a:r>
+            <a:r>
+              <a:rPr sz="1500">
                 <a:solidFill>
                   <a:srgbClr val="E2E8F0"/>
                 </a:solidFill>
                 <a:latin typeface="Segoe UI"/>
               </a:rPr>
-              <a:t> aucune ressource CDN : la démo fonctionne sans Internet (hors push Git).</a:t>
+              <a:t> les volumes postgres + mongo survivent à un down / up (sans -v).</a:t>
             </a:r>
           </a:p>
         </p:txBody>
@@ -5749,7 +6858,7 @@
 </p:sld>
 </file>
 
-<file path=ppt/slides/slide15.xml><?xml version="1.0" encoding="utf-8"?>
+<file path=ppt/slides/slide17.xml><?xml version="1.0" encoding="utf-8"?>
 <p:sld xmlns:a="http://schemas.openxmlformats.org/drawingml/2006/main" xmlns:p="http://schemas.openxmlformats.org/presentationml/2006/main" xmlns:r="http://schemas.openxmlformats.org/officeDocument/2006/relationships">
   <p:cSld>
     <p:bg>
@@ -5896,7 +7005,7 @@
                 </a:solidFill>
                 <a:latin typeface="Segoe UI"/>
               </a:rPr>
-              <a:t>14</a:t>
+              <a:t>16</a:t>
             </a:r>
           </a:p>
         </p:txBody>
@@ -5929,22 +7038,22 @@
               </a:spcAft>
             </a:pPr>
             <a:r>
-              <a:rPr b="1" sz="1700">
+              <a:rPr b="1" sz="1600">
                 <a:solidFill>
                   <a:srgbClr val="38BDF8"/>
                 </a:solidFill>
                 <a:latin typeface="Segoe UI"/>
               </a:rPr>
-              <a:t>• Kubernetes</a:t>
-            </a:r>
-            <a:r>
-              <a:rPr sz="1700">
+              <a:t>• Sécurité inter-services</a:t>
+            </a:r>
+            <a:r>
+              <a:rPr sz="1600">
                 <a:solidFill>
                   <a:srgbClr val="E2E8F0"/>
                 </a:solidFill>
                 <a:latin typeface="Segoe UI"/>
               </a:rPr>
-              <a:t> Deployments, Services, Ingress, autoscaling horizontal.</a:t>
+              <a:t> jetons de service (client credentials) ou mTLS.</a:t>
             </a:r>
           </a:p>
           <a:p>
@@ -5954,22 +7063,22 @@
               </a:spcAft>
             </a:pPr>
             <a:r>
-              <a:rPr b="1" sz="1700">
+              <a:rPr b="1" sz="1600">
                 <a:solidFill>
                   <a:srgbClr val="38BDF8"/>
                 </a:solidFill>
                 <a:latin typeface="Segoe UI"/>
               </a:rPr>
-              <a:t>• GitOps</a:t>
-            </a:r>
-            <a:r>
-              <a:rPr sz="1700">
+              <a:t>• Alerting</a:t>
+            </a:r>
+            <a:r>
+              <a:rPr sz="1600">
                 <a:solidFill>
                   <a:srgbClr val="E2E8F0"/>
                 </a:solidFill>
                 <a:latin typeface="Segoe UI"/>
               </a:rPr>
-              <a:t> ArgoCD : la production suit l'état du dépôt Git.</a:t>
+              <a:t> règles Prometheus + Alertmanager (latence, 5xx, cible DOWN).</a:t>
             </a:r>
           </a:p>
           <a:p>
@@ -5979,22 +7088,22 @@
               </a:spcAft>
             </a:pPr>
             <a:r>
-              <a:rPr b="1" sz="1700">
+              <a:rPr b="1" sz="1600">
                 <a:solidFill>
                   <a:srgbClr val="38BDF8"/>
                 </a:solidFill>
                 <a:latin typeface="Segoe UI"/>
               </a:rPr>
-              <a:t>• Logs &amp; traces</a:t>
-            </a:r>
-            <a:r>
-              <a:rPr sz="1700">
+              <a:t>• CI/CD</a:t>
+            </a:r>
+            <a:r>
+              <a:rPr sz="1600">
                 <a:solidFill>
                   <a:srgbClr val="E2E8F0"/>
                 </a:solidFill>
                 <a:latin typeface="Segoe UI"/>
               </a:rPr>
-              <a:t> Loki + OpenTelemetry : les trois piliers de l'observabilité.</a:t>
+              <a:t> pipeline build + tests + publication d'images pour cette pile.</a:t>
             </a:r>
           </a:p>
           <a:p>
@@ -6004,22 +7113,22 @@
               </a:spcAft>
             </a:pPr>
             <a:r>
-              <a:rPr b="1" sz="1700">
+              <a:rPr b="1" sz="1600">
                 <a:solidFill>
                   <a:srgbClr val="38BDF8"/>
                 </a:solidFill>
                 <a:latin typeface="Segoe UI"/>
               </a:rPr>
-              <a:t>• Alerting</a:t>
-            </a:r>
-            <a:r>
-              <a:rPr sz="1700">
+              <a:t>• Cohérence métier</a:t>
+            </a:r>
+            <a:r>
+              <a:rPr sz="1600">
                 <a:solidFill>
                   <a:srgbClr val="E2E8F0"/>
                 </a:solidFill>
                 <a:latin typeface="Segoe UI"/>
               </a:rPr>
-              <a:t> règles Alertmanager → Slack/Email (latence, erreurs, disponibilité).</a:t>
+              <a:t> décrément de stock, sagas pour les transactions distribuées.</a:t>
             </a:r>
           </a:p>
           <a:p>
@@ -6029,22 +7138,22 @@
               </a:spcAft>
             </a:pPr>
             <a:r>
-              <a:rPr b="1" sz="1700">
+              <a:rPr b="1" sz="1600">
                 <a:solidFill>
                   <a:srgbClr val="38BDF8"/>
                 </a:solidFill>
                 <a:latin typeface="Segoe UI"/>
               </a:rPr>
-              <a:t>• Qualité SonarQube</a:t>
-            </a:r>
-            <a:r>
-              <a:rPr sz="1700">
+              <a:t>• Traces &amp; logs</a:t>
+            </a:r>
+            <a:r>
+              <a:rPr sz="1600">
                 <a:solidFill>
                   <a:srgbClr val="E2E8F0"/>
                 </a:solidFill>
                 <a:latin typeface="Segoe UI"/>
               </a:rPr>
-              <a:t> dette technique et code smells.</a:t>
+              <a:t> OpenTelemetry + Loki : compléter les métriques.</a:t>
             </a:r>
           </a:p>
           <a:p>
@@ -6054,22 +7163,22 @@
               </a:spcAft>
             </a:pPr>
             <a:r>
-              <a:rPr b="1" sz="1700">
+              <a:rPr b="1" sz="1600">
                 <a:solidFill>
                   <a:srgbClr val="38BDF8"/>
                 </a:solidFill>
                 <a:latin typeface="Segoe UI"/>
               </a:rPr>
-              <a:t>• Tests de charge</a:t>
-            </a:r>
-            <a:r>
-              <a:rPr sz="1700">
+              <a:t>• Industrialisation</a:t>
+            </a:r>
+            <a:r>
+              <a:rPr sz="1600">
                 <a:solidFill>
                   <a:srgbClr val="E2E8F0"/>
                 </a:solidFill>
                 <a:latin typeface="Segoe UI"/>
               </a:rPr>
-              <a:t> k6 + SLO définis sur la latence p95.</a:t>
+              <a:t> Kubernetes (Ingress, HPA) et approche GitOps.</a:t>
             </a:r>
           </a:p>
         </p:txBody>
@@ -6082,7 +7191,7 @@
 </p:sld>
 </file>
 
-<file path=ppt/slides/slide16.xml><?xml version="1.0" encoding="utf-8"?>
+<file path=ppt/slides/slide18.xml><?xml version="1.0" encoding="utf-8"?>
 <p:sld xmlns:a="http://schemas.openxmlformats.org/drawingml/2006/main" xmlns:p="http://schemas.openxmlformats.org/presentationml/2006/main" xmlns:r="http://schemas.openxmlformats.org/officeDocument/2006/relationships">
   <p:cSld>
     <p:bg>
@@ -6200,8 +7309,8 @@
                 </a:solidFill>
                 <a:latin typeface="Segoe UI"/>
               </a:rPr>
-              <a:t>PFE Flow — Licence DevOps · FSAC Casablanca
-Démo : 127.0.0.1:8000 · Grafana : 127.0.0.1:3000</a:t>
+              <a:t>Plateforme e-commerce microservices · Licence DevOps · FSAC Casablanca
+Démo : localhost:5173 · Grafana : localhost:3000</a:t>
             </a:r>
           </a:p>
         </p:txBody>
@@ -6466,7 +7575,7 @@
                 </a:solidFill>
                 <a:latin typeface="Segoe UI"/>
               </a:rPr>
-              <a:t>DevOps, CI/CD, conteneurisation, observabilité</a:t>
+              <a:t>du monolithe aux microservices</a:t>
             </a:r>
           </a:p>
         </p:txBody>
@@ -6676,7 +7785,7 @@
                 </a:solidFill>
                 <a:latin typeface="Segoe UI"/>
               </a:rPr>
-              <a:t>modèle de données, pipeline, observabilité</a:t>
+              <a:t>services, sécurité, observabilité</a:t>
             </a:r>
           </a:p>
         </p:txBody>
@@ -6781,7 +7890,7 @@
                 </a:solidFill>
                 <a:latin typeface="Segoe UI"/>
               </a:rPr>
-              <a:t>Docker, GitHub Actions, Prometheus/Grafana</a:t>
+              <a:t>Docker, Keycloak, Prometheus/Grafana</a:t>
             </a:r>
           </a:p>
         </p:txBody>
@@ -6886,7 +7995,7 @@
                 </a:solidFill>
                 <a:latin typeface="Segoe UI"/>
               </a:rPr>
-              <a:t>99 % de couverture, démo live</a:t>
+              <a:t>52 tests, 7 cibles, 13 conteneurs</a:t>
             </a:r>
           </a:p>
         </p:txBody>
@@ -6947,7 +8056,7 @@
                 </a:solidFill>
                 <a:latin typeface="Segoe UI"/>
               </a:rPr>
-              <a:t>Contexte : pourquoi le DevOps ?</a:t>
+              <a:t>Contexte : du monolithe aux microservices</a:t>
             </a:r>
           </a:p>
         </p:txBody>
@@ -6982,7 +8091,7 @@
                 </a:solidFill>
                 <a:latin typeface="Segoe UI"/>
               </a:rPr>
-              <a:t>De la cascade au flux continu</a:t>
+              <a:t>Modularité, résilience, scalabilité ciblée</a:t>
             </a:r>
           </a:p>
         </p:txBody>
@@ -7085,7 +8194,7 @@
                 </a:solidFill>
                 <a:latin typeface="Segoe UI"/>
               </a:rPr>
-              <a:t>• DevOps</a:t>
+              <a:t>• Monolithe</a:t>
             </a:r>
             <a:r>
               <a:rPr sz="1600">
@@ -7094,7 +8203,7 @@
                 </a:solidFill>
                 <a:latin typeface="Segoe UI"/>
               </a:rPr>
-              <a:t> rapprocher développement et exploitation, livrer plus vite et mieux.</a:t>
+              <a:t> un seul déployable : simple, mais couplage fort et scalabilité globale.</a:t>
             </a:r>
           </a:p>
           <a:p>
@@ -7110,7 +8219,7 @@
                 </a:solidFill>
                 <a:latin typeface="Segoe UI"/>
               </a:rPr>
-              <a:t>• Intégration continue</a:t>
+              <a:t>• Microservices</a:t>
             </a:r>
             <a:r>
               <a:rPr sz="1600">
@@ -7119,7 +8228,7 @@
                 </a:solidFill>
                 <a:latin typeface="Segoe UI"/>
               </a:rPr>
-              <a:t> chaque push déclenche tests + contrôles qualité.</a:t>
+              <a:t> services autonomes par domaine, déployés indépendamment.</a:t>
             </a:r>
           </a:p>
           <a:p>
@@ -7135,7 +8244,7 @@
                 </a:solidFill>
                 <a:latin typeface="Segoe UI"/>
               </a:rPr>
-              <a:t>• Déploiement continu</a:t>
+              <a:t>• Bénéfices</a:t>
             </a:r>
             <a:r>
               <a:rPr sz="1600">
@@ -7144,7 +8253,7 @@
                 </a:solidFill>
                 <a:latin typeface="Segoe UI"/>
               </a:rPr>
-              <a:t> le code validé devient production sans manipulation.</a:t>
+              <a:t> isolation des pannes, équipes et montées en charge ciblées.</a:t>
             </a:r>
           </a:p>
           <a:p>
@@ -7160,7 +8269,7 @@
                 </a:solidFill>
                 <a:latin typeface="Segoe UI"/>
               </a:rPr>
-              <a:t>• Conteneurisation</a:t>
+              <a:t>• Défis</a:t>
             </a:r>
             <a:r>
               <a:rPr sz="1600">
@@ -7169,7 +8278,7 @@
                 </a:solidFill>
                 <a:latin typeface="Segoe UI"/>
               </a:rPr>
-              <a:t> « ça marche sur ma machine » éliminé par l'image Docker.</a:t>
+              <a:t> découverte, configuration, sécurité distribuée, observabilité.</a:t>
             </a:r>
           </a:p>
           <a:p>
@@ -7185,7 +8294,7 @@
                 </a:solidFill>
                 <a:latin typeface="Segoe UI"/>
               </a:rPr>
-              <a:t>• Observabilité</a:t>
+              <a:t>• Réponse</a:t>
             </a:r>
             <a:r>
               <a:rPr sz="1600">
@@ -7194,7 +8303,7 @@
                 </a:solidFill>
                 <a:latin typeface="Segoe UI"/>
               </a:rPr>
-              <a:t> l'application expose son état et ses métriques en continu.</a:t>
+              <a:t> briques Spring Cloud + Keycloak + Prometheus/Grafana.</a:t>
             </a:r>
           </a:p>
         </p:txBody>
@@ -7222,19 +8331,19 @@
           <a:lstStyle/>
           <a:p>
             <a:r>
-              <a:rPr sz="1500">
+              <a:rPr sz="1400">
                 <a:solidFill>
                   <a:srgbClr val="E2E8F0"/>
                 </a:solidFill>
                 <a:latin typeface="Consolas"/>
               </a:rPr>
-              <a:t>commit
-  └─► lint
-        └─► tests
-              └─► build image
-                    └─► scan sécurité
-                          └─► publish
-                                └─► deploy</a:t>
+              <a:t>Navigateur
+  └─► API Gateway
+        ├─► product-service
+        ├─► customer-service
+        ├─► cart-service
+        └─► order-service
+  (Eureka = annuaire · Config Server = config)</a:t>
             </a:r>
           </a:p>
         </p:txBody>
@@ -7247,8 +8356,8 @@
         </p:nvSpPr>
         <p:spPr>
           <a:xfrm>
-            <a:off x="6675120" y="4846320"/>
-            <a:ext cx="5120640" cy="1371600"/>
+            <a:off x="6675120" y="4572000"/>
+            <a:ext cx="5120640" cy="1645920"/>
           </a:xfrm>
           <a:prstGeom prst="rect">
             <a:avLst/>
@@ -7269,8 +8378,7 @@
                 </a:solidFill>
                 <a:latin typeface="Segoe UI"/>
               </a:rPr>
-              <a:t>Indicateurs DORA : fréquence de déploiement, délai de mise en production,
-taux d'échec, temps de restauration.</a:t>
+              <a:t>Un point d'entrée unique (la passerelle) porte le routage, le CORS et la sécurité ; les services restent privés sur le réseau Docker.</a:t>
             </a:r>
           </a:p>
         </p:txBody>
@@ -7430,7 +8538,7 @@
                 </a:solidFill>
                 <a:latin typeface="Segoe UI"/>
               </a:rPr>
-              <a:t>Comment passer d'un code fonctionnel sur un poste de développement à une application livrable, reproductible, testée et observable ?</a:t>
+              <a:t>Comment passer de services développés séparément à une plateforme cohérente, reproductible, sécurisée et observable ?</a:t>
             </a:r>
           </a:p>
         </p:txBody>
@@ -7444,7 +8552,7 @@
         <p:spPr>
           <a:xfrm>
             <a:off x="640080" y="2651760"/>
-            <a:ext cx="5486400" cy="3657600"/>
+            <a:ext cx="10972800" cy="3657600"/>
           </a:xfrm>
           <a:prstGeom prst="rect">
             <a:avLst/>
@@ -7469,7 +8577,7 @@
                 </a:solidFill>
                 <a:latin typeface="Segoe UI"/>
               </a:rPr>
-              <a:t>• Application web complète</a:t>
+              <a:t>• Domaine</a:t>
             </a:r>
             <a:r>
               <a:rPr sz="1600">
@@ -7478,7 +8586,7 @@
                 </a:solidFill>
                 <a:latin typeface="Segoe UI"/>
               </a:rPr>
-              <a:t> CRUD projets, tâches, recherche, API REST.</a:t>
+              <a:t> catalogue, clients, paniers, commandes.</a:t>
             </a:r>
           </a:p>
           <a:p>
@@ -7494,7 +8602,7 @@
                 </a:solidFill>
                 <a:latin typeface="Segoe UI"/>
               </a:rPr>
-              <a:t>• Image Docker multi-stage</a:t>
+              <a:t>• Architecture</a:t>
             </a:r>
             <a:r>
               <a:rPr sz="1600">
@@ -7503,7 +8611,7 @@
                 </a:solidFill>
                 <a:latin typeface="Segoe UI"/>
               </a:rPr>
-              <a:t> non-root, healthcheck, couches cachées.</a:t>
+              <a:t> 4 services métier + config + découverte + passerelle.</a:t>
             </a:r>
           </a:p>
           <a:p>
@@ -7519,7 +8627,7 @@
                 </a:solidFill>
                 <a:latin typeface="Segoe UI"/>
               </a:rPr>
-              <a:t>• Orchestration Compose</a:t>
+              <a:t>• Conteneurisation</a:t>
             </a:r>
             <a:r>
               <a:rPr sz="1600">
@@ -7528,7 +8636,7 @@
                 </a:solidFill>
                 <a:latin typeface="Segoe UI"/>
               </a:rPr>
-              <a:t> PostgreSQL, volumes, dépendances saines.</a:t>
+              <a:t> Docker Compose : 13 conteneurs, volumes, healthchecks.</a:t>
             </a:r>
           </a:p>
           <a:p>
@@ -7544,7 +8652,7 @@
                 </a:solidFill>
                 <a:latin typeface="Segoe UI"/>
               </a:rPr>
-              <a:t>• Pipeline CI/CD</a:t>
+              <a:t>• Sécurité</a:t>
             </a:r>
             <a:r>
               <a:rPr sz="1600">
@@ -7553,7 +8661,7 @@
                 </a:solidFill>
                 <a:latin typeface="Segoe UI"/>
               </a:rPr>
-              <a:t> qualité → tests → build → scan → publication → déploiement.</a:t>
+              <a:t> OIDC (Keycloak), JWT, autorisation par rôle et par propriété.</a:t>
             </a:r>
           </a:p>
           <a:p>
@@ -7569,7 +8677,7 @@
                 </a:solidFill>
                 <a:latin typeface="Segoe UI"/>
               </a:rPr>
-              <a:t>• Observabilité as code</a:t>
+              <a:t>• Persistance</a:t>
             </a:r>
             <a:r>
               <a:rPr sz="1600">
@@ -7578,7 +8686,7 @@
                 </a:solidFill>
                 <a:latin typeface="Segoe UI"/>
               </a:rPr>
-              <a:t> Prometheus + Grafana provisionnés en YAML/JSON.</a:t>
+              <a:t> polyglotte : PostgreSQL (référentiels) + MongoDB (agrégats).</a:t>
             </a:r>
           </a:p>
           <a:p>
@@ -7594,7 +8702,7 @@
                 </a:solidFill>
                 <a:latin typeface="Segoe UI"/>
               </a:rPr>
-              <a:t>• Qualité garantie</a:t>
+              <a:t>• Observabilité</a:t>
             </a:r>
             <a:r>
               <a:rPr sz="1600">
@@ -7603,7 +8711,32 @@
                 </a:solidFill>
                 <a:latin typeface="Segoe UI"/>
               </a:rPr>
-              <a:t> 9 tests, 99 % de couverture, seuil bloquant à 90 %.</a:t>
+              <a:t> métriques Prometheus (7 cibles) + dashboard Grafana.</a:t>
+            </a:r>
+          </a:p>
+          <a:p>
+            <a:pPr>
+              <a:spcAft>
+                <a:spcPts val="1000"/>
+              </a:spcAft>
+            </a:pPr>
+            <a:r>
+              <a:rPr b="1" sz="1600">
+                <a:solidFill>
+                  <a:srgbClr val="38BDF8"/>
+                </a:solidFill>
+                <a:latin typeface="Segoe UI"/>
+              </a:rPr>
+              <a:t>• Qualité</a:t>
+            </a:r>
+            <a:r>
+              <a:rPr sz="1600">
+                <a:solidFill>
+                  <a:srgbClr val="E2E8F0"/>
+                </a:solidFill>
+                <a:latin typeface="Segoe UI"/>
+              </a:rPr>
+              <a:t> 52 tests automatisés, tous au vert.</a:t>
             </a:r>
           </a:p>
         </p:txBody>
@@ -7788,8 +8921,8 @@
               </a:tblPr>
               <a:tblGrid>
                 <a:gridCol w="2011680"/>
-                <a:gridCol w="3840480"/>
-                <a:gridCol w="5120640"/>
+                <a:gridCol w="4206240"/>
+                <a:gridCol w="4754880"/>
               </a:tblGrid>
               <a:tr h="365760">
                 <a:tc>
@@ -7872,7 +9005,7 @@
                           </a:solidFill>
                           <a:latin typeface="Segoe UI"/>
                         </a:rPr>
-                        <a:t>Application</a:t>
+                        <a:t>Services</a:t>
                       </a:r>
                     </a:p>
                   </a:txBody>
@@ -7894,7 +9027,7 @@
                           </a:solidFill>
                           <a:latin typeface="Segoe UI"/>
                         </a:rPr>
-                        <a:t>Python 3.14 · FastAPI · Jinja2</a:t>
+                        <a:t>Java 21 · Spring Boot 3.3 · Spring Cloud</a:t>
                       </a:r>
                     </a:p>
                   </a:txBody>
@@ -7916,7 +9049,7 @@
                           </a:solidFill>
                           <a:latin typeface="Segoe UI"/>
                         </a:rPr>
-                        <a:t>Rapide, OpenAPI auto, zéro build front</a:t>
+                        <a:t>Robustesse, écosystème microservices</a:t>
                       </a:r>
                     </a:p>
                   </a:txBody>
@@ -7962,7 +9095,7 @@
                           </a:solidFill>
                           <a:latin typeface="Segoe UI"/>
                         </a:rPr>
-                        <a:t>SQLAlchemy 2 · PostgreSQL 17</a:t>
+                        <a:t>PostgreSQL 16 + MongoDB 7</a:t>
                       </a:r>
                     </a:p>
                   </a:txBody>
@@ -7984,7 +9117,7 @@
                           </a:solidFill>
                           <a:latin typeface="Segoe UI"/>
                         </a:rPr>
-                        <a:t>Typage moderne, standard industriel</a:t>
+                        <a:t>Polyglotte : relationnel + documentaire</a:t>
                       </a:r>
                     </a:p>
                   </a:txBody>
@@ -8008,7 +9141,7 @@
                           </a:solidFill>
                           <a:latin typeface="Segoe UI"/>
                         </a:rPr>
-                        <a:t>Conteneurs</a:t>
+                        <a:t>Identité</a:t>
                       </a:r>
                     </a:p>
                   </a:txBody>
@@ -8030,7 +9163,7 @@
                           </a:solidFill>
                           <a:latin typeface="Segoe UI"/>
                         </a:rPr>
-                        <a:t>Docker (multi-stage) · Compose</a:t>
+                        <a:t>Keycloak 26 (OIDC / OAuth2)</a:t>
                       </a:r>
                     </a:p>
                   </a:txBody>
@@ -8052,7 +9185,7 @@
                           </a:solidFill>
                           <a:latin typeface="Segoe UI"/>
                         </a:rPr>
-                        <a:t>Reproductibilité, profils d'environnement</a:t>
+                        <a:t>Rôles et attributs, jetons JWT</a:t>
                       </a:r>
                     </a:p>
                   </a:txBody>
@@ -8076,7 +9209,7 @@
                           </a:solidFill>
                           <a:latin typeface="Segoe UI"/>
                         </a:rPr>
-                        <a:t>CI/CD</a:t>
+                        <a:t>Frontend</a:t>
                       </a:r>
                     </a:p>
                   </a:txBody>
@@ -8098,7 +9231,7 @@
                           </a:solidFill>
                           <a:latin typeface="Segoe UI"/>
                         </a:rPr>
-                        <a:t>GitHub Actions · GHCR · Trivy</a:t>
+                        <a:t>React 19 · Vite · TypeScript</a:t>
                       </a:r>
                     </a:p>
                   </a:txBody>
@@ -8120,75 +9253,7 @@
                           </a:solidFill>
                           <a:latin typeface="Segoe UI"/>
                         </a:rPr>
-                        <a:t>Sans serveur, registre intégré, scan sécurité</a:t>
-                      </a:r>
-                    </a:p>
-                  </a:txBody>
-                  <a:tcPr marL="73152" marR="73152" marT="27432" marB="27432">
-                    <a:solidFill>
-                      <a:srgbClr val="1E293B"/>
-                    </a:solidFill>
-                  </a:tcPr>
-                </a:tc>
-              </a:tr>
-              <a:tr h="365760">
-                <a:tc>
-                  <a:txBody>
-                    <a:bodyPr/>
-                    <a:lstStyle/>
-                    <a:p>
-                      <a:r>
-                        <a:rPr sz="1400" b="0">
-                          <a:solidFill>
-                            <a:srgbClr val="E2E8F0"/>
-                          </a:solidFill>
-                          <a:latin typeface="Segoe UI"/>
-                        </a:rPr>
-                        <a:t>Qualité</a:t>
-                      </a:r>
-                    </a:p>
-                  </a:txBody>
-                  <a:tcPr marL="73152" marR="73152" marT="27432" marB="27432">
-                    <a:solidFill>
-                      <a:srgbClr val="1E293B"/>
-                    </a:solidFill>
-                  </a:tcPr>
-                </a:tc>
-                <a:tc>
-                  <a:txBody>
-                    <a:bodyPr/>
-                    <a:lstStyle/>
-                    <a:p>
-                      <a:r>
-                        <a:rPr sz="1400" b="0">
-                          <a:solidFill>
-                            <a:srgbClr val="E2E8F0"/>
-                          </a:solidFill>
-                          <a:latin typeface="Segoe UI"/>
-                        </a:rPr>
-                        <a:t>Ruff · pytest · pytest-cov</a:t>
-                      </a:r>
-                    </a:p>
-                  </a:txBody>
-                  <a:tcPr marL="73152" marR="73152" marT="27432" marB="27432">
-                    <a:solidFill>
-                      <a:srgbClr val="1E293B"/>
-                    </a:solidFill>
-                  </a:tcPr>
-                </a:tc>
-                <a:tc>
-                  <a:txBody>
-                    <a:bodyPr/>
-                    <a:lstStyle/>
-                    <a:p>
-                      <a:r>
-                        <a:rPr sz="1400" b="0">
-                          <a:solidFill>
-                            <a:srgbClr val="E2E8F0"/>
-                          </a:solidFill>
-                          <a:latin typeface="Segoe UI"/>
-                        </a:rPr>
-                        <a:t>Lint/format ultra-rapides, couverture ≥ 90 %</a:t>
+                        <a:t>SPA typée, Authorization Code + PKCE</a:t>
                       </a:r>
                     </a:p>
                   </a:txBody>
@@ -8267,6 +9332,74 @@
                   </a:tcPr>
                 </a:tc>
               </a:tr>
+              <a:tr h="365760">
+                <a:tc>
+                  <a:txBody>
+                    <a:bodyPr/>
+                    <a:lstStyle/>
+                    <a:p>
+                      <a:r>
+                        <a:rPr sz="1400" b="0">
+                          <a:solidFill>
+                            <a:srgbClr val="E2E8F0"/>
+                          </a:solidFill>
+                          <a:latin typeface="Segoe UI"/>
+                        </a:rPr>
+                        <a:t>Orchestration</a:t>
+                      </a:r>
+                    </a:p>
+                  </a:txBody>
+                  <a:tcPr marL="73152" marR="73152" marT="27432" marB="27432">
+                    <a:solidFill>
+                      <a:srgbClr val="1E293B"/>
+                    </a:solidFill>
+                  </a:tcPr>
+                </a:tc>
+                <a:tc>
+                  <a:txBody>
+                    <a:bodyPr/>
+                    <a:lstStyle/>
+                    <a:p>
+                      <a:r>
+                        <a:rPr sz="1400" b="0">
+                          <a:solidFill>
+                            <a:srgbClr val="E2E8F0"/>
+                          </a:solidFill>
+                          <a:latin typeface="Segoe UI"/>
+                        </a:rPr>
+                        <a:t>Docker Compose</a:t>
+                      </a:r>
+                    </a:p>
+                  </a:txBody>
+                  <a:tcPr marL="73152" marR="73152" marT="27432" marB="27432">
+                    <a:solidFill>
+                      <a:srgbClr val="1E293B"/>
+                    </a:solidFill>
+                  </a:tcPr>
+                </a:tc>
+                <a:tc>
+                  <a:txBody>
+                    <a:bodyPr/>
+                    <a:lstStyle/>
+                    <a:p>
+                      <a:r>
+                        <a:rPr sz="1400" b="0">
+                          <a:solidFill>
+                            <a:srgbClr val="E2E8F0"/>
+                          </a:solidFill>
+                          <a:latin typeface="Segoe UI"/>
+                        </a:rPr>
+                        <a:t>Pile locale reproductible (13 conteneurs)</a:t>
+                      </a:r>
+                    </a:p>
+                  </a:txBody>
+                  <a:tcPr marL="73152" marR="73152" marT="27432" marB="27432">
+                    <a:solidFill>
+                      <a:srgbClr val="1E293B"/>
+                    </a:solidFill>
+                  </a:tcPr>
+                </a:tc>
+              </a:tr>
             </a:tbl>
           </a:graphicData>
         </a:graphic>
@@ -8404,8 +9537,8 @@
         </p:nvSpPr>
         <p:spPr>
           <a:xfrm>
-            <a:off x="640080" y="1554480"/>
-            <a:ext cx="10972800" cy="4206240"/>
+            <a:off x="457200" y="1554480"/>
+            <a:ext cx="11247120" cy="4389120"/>
           </a:xfrm>
           <a:prstGeom prst="rect">
             <a:avLst/>
@@ -8419,60 +9552,29 @@
           <a:lstStyle/>
           <a:p>
             <a:r>
-              <a:rPr sz="1300">
+              <a:rPr sz="1200">
                 <a:solidFill>
                   <a:srgbClr val="E2E8F0"/>
                 </a:solidFill>
                 <a:latin typeface="Consolas"/>
               </a:rPr>
-              <a:t>                      ┌────────────────────────────────────────────┐
-                      │      GitHub Actions  (push / PR)          │
-                      │  quality ─► docker ─► deploy (optionnel)  │
-                      └──────────────────┬───────────────────────┘
-                                         │ build + push (GHCR)
-  Navigateur ────────► ┌──────────────────▼───────────────────────┐
-  :8000  app          │  app FastAPI (uvicorn, non-root, sain)   │
-  ◄── Prometheus ─────│  /metrics  /healthz  /api  /projects      │
-      scrape 5s       └──────────────────┬───────────────────────┘
-  Grafana :3000                          │ SQLAlchemy
-  dashboard auto     ┌───────────────────▼───────────────────────┐
-                     │  PostgreSQL :5432   volume db-data        │
-                     └────────────────────────────────────────────┘</a:t>
-            </a:r>
-          </a:p>
-        </p:txBody>
-      </p:sp>
-      <p:sp>
-        <p:nvSpPr>
-          <p:cNvPr id="6" name="TextBox 5"/>
-          <p:cNvSpPr txBox="1"/>
-          <p:nvPr/>
-        </p:nvSpPr>
-        <p:spPr>
-          <a:xfrm>
-            <a:off x="640080" y="5852160"/>
-            <a:ext cx="10972800" cy="457200"/>
-          </a:xfrm>
-          <a:prstGeom prst="rect">
-            <a:avLst/>
-          </a:prstGeom>
-          <a:noFill/>
-        </p:spPr>
-        <p:txBody>
-          <a:bodyPr wrap="square" anchor="t">
-            <a:spAutoFit/>
-          </a:bodyPr>
-          <a:lstStyle/>
-          <a:p>
-            <a:pPr algn="l"/>
-            <a:r>
-              <a:rPr sz="1400" b="0">
-                <a:solidFill>
-                  <a:srgbClr val="94A3B8"/>
-                </a:solidFill>
-                <a:latin typeface="Segoe UI"/>
-              </a:rPr>
-              <a:t>Profil Compose « observability » : la pile de base reste app + base ; Prometheus/Grafana s'ajoutent en une commande.</a:t>
+              <a:t>                         ┌───────────────────────────┐
+                         │      Keycloak :8181        │  fournisseur OIDC
+                         └─────────────▲─────────────┘
+  Navigateur (SPA React)               │ jetons JWT
+        │ Authorization Code + PKCE    │
+        ▼                              │
+  ┌────────────────────────┐    ┌──────┴───────┐
+  │  API Gateway :8090     │◄──►│ Eureka :8761 │  annuaire de services
+  │  routage · CORS · JWT  │    └──────────────┘
+  └───┬───────┬───────┬────┘
+      ▼       ▼       ▼
+  product  customer  cart  order     services REST (privés au réseau Docker)
+    :8081   :8082   :8083  :8084
+      └───────┴───┬───┴───────┘
+                  ▼
+        PostgreSQL :5432 · MongoDB :27017 · Config Server :8888
+  Prometheus :9090 scrape 7 cibles ──► Grafana :3000 (dashboard)</a:t>
             </a:r>
           </a:p>
         </p:txBody>
@@ -8533,7 +9635,7 @@
                 </a:solidFill>
                 <a:latin typeface="Segoe UI"/>
               </a:rPr>
-              <a:t>L'application — tableau de bord</a:t>
+              <a:t>Découpage en services (bounded contexts)</a:t>
             </a:r>
           </a:p>
         </p:txBody>
@@ -8568,7 +9670,7 @@
                 </a:solidFill>
                 <a:latin typeface="Segoe UI"/>
               </a:rPr>
-              <a:t>Démo live : http://127.0.0.1:8000</a:t>
+              <a:t>Un service par domaine — persistance polyglotte</a:t>
             </a:r>
           </a:p>
         </p:txBody>
@@ -8637,178 +9739,707 @@
           </a:p>
         </p:txBody>
       </p:sp>
-      <p:pic>
-        <p:nvPicPr>
-          <p:cNvPr id="6" name="Picture 5" descr="app-dashboard.png"/>
-          <p:cNvPicPr>
-            <a:picLocks noChangeAspect="1"/>
-          </p:cNvPicPr>
-          <p:nvPr/>
-        </p:nvPicPr>
-        <p:blipFill>
-          <a:blip r:embed="rId2"/>
-          <a:stretch>
-            <a:fillRect/>
-          </a:stretch>
-        </p:blipFill>
-        <p:spPr>
-          <a:xfrm>
-            <a:off x="640080" y="1554480"/>
-            <a:ext cx="7498079" cy="4820193"/>
-          </a:xfrm>
-          <a:prstGeom prst="rect">
-            <a:avLst/>
-          </a:prstGeom>
-        </p:spPr>
-      </p:pic>
-      <p:sp>
-        <p:nvSpPr>
-          <p:cNvPr id="7" name="TextBox 6"/>
-          <p:cNvSpPr txBox="1"/>
-          <p:nvPr/>
-        </p:nvSpPr>
-        <p:spPr>
-          <a:xfrm>
-            <a:off x="8412480" y="1645920"/>
-            <a:ext cx="3383280" cy="4114800"/>
-          </a:xfrm>
-          <a:prstGeom prst="rect">
-            <a:avLst/>
-          </a:prstGeom>
-          <a:noFill/>
-        </p:spPr>
-        <p:txBody>
-          <a:bodyPr wrap="square">
-            <a:spAutoFit/>
-          </a:bodyPr>
-          <a:lstStyle/>
-          <a:p>
-            <a:pPr>
-              <a:spcAft>
-                <a:spcPts val="1000"/>
-              </a:spcAft>
-            </a:pPr>
-            <a:r>
-              <a:rPr b="1" sz="1500">
-                <a:solidFill>
-                  <a:srgbClr val="38BDF8"/>
-                </a:solidFill>
-                <a:latin typeface="Segoe UI"/>
-              </a:rPr>
-              <a:t>• Compteurs</a:t>
-            </a:r>
-            <a:r>
-              <a:rPr sz="1500">
-                <a:solidFill>
-                  <a:srgbClr val="E2E8F0"/>
-                </a:solidFill>
-                <a:latin typeface="Segoe UI"/>
-              </a:rPr>
-              <a:t> projets, tâches, avancement</a:t>
-            </a:r>
-          </a:p>
-          <a:p>
-            <a:pPr>
-              <a:spcAft>
-                <a:spcPts val="1000"/>
-              </a:spcAft>
-            </a:pPr>
-            <a:r>
-              <a:rPr b="1" sz="1500">
-                <a:solidFill>
-                  <a:srgbClr val="38BDF8"/>
-                </a:solidFill>
-                <a:latin typeface="Segoe UI"/>
-              </a:rPr>
-              <a:t>• Recherche</a:t>
-            </a:r>
-            <a:r>
-              <a:rPr sz="1500">
-                <a:solidFill>
-                  <a:srgbClr val="E2E8F0"/>
-                </a:solidFill>
-                <a:latin typeface="Segoe UI"/>
-              </a:rPr>
-              <a:t> titre ou étudiant</a:t>
-            </a:r>
-          </a:p>
-          <a:p>
-            <a:pPr>
-              <a:spcAft>
-                <a:spcPts val="1000"/>
-              </a:spcAft>
-            </a:pPr>
-            <a:r>
-              <a:rPr b="1" sz="1500">
-                <a:solidFill>
-                  <a:srgbClr val="38BDF8"/>
-                </a:solidFill>
-                <a:latin typeface="Segoe UI"/>
-              </a:rPr>
-              <a:t>• Filtres</a:t>
-            </a:r>
-            <a:r>
-              <a:rPr sz="1500">
-                <a:solidFill>
-                  <a:srgbClr val="E2E8F0"/>
-                </a:solidFill>
-                <a:latin typeface="Segoe UI"/>
-              </a:rPr>
-              <a:t> statut : en cours / soutenu / validé</a:t>
-            </a:r>
-          </a:p>
-          <a:p>
-            <a:pPr>
-              <a:spcAft>
-                <a:spcPts val="1000"/>
-              </a:spcAft>
-            </a:pPr>
-            <a:r>
-              <a:rPr b="1" sz="1500">
-                <a:solidFill>
-                  <a:srgbClr val="38BDF8"/>
-                </a:solidFill>
-                <a:latin typeface="Segoe UI"/>
-              </a:rPr>
-              <a:t>• Barres d'avancement</a:t>
-            </a:r>
-            <a:r>
-              <a:rPr sz="1500">
-                <a:solidFill>
-                  <a:srgbClr val="E2E8F0"/>
-                </a:solidFill>
-                <a:latin typeface="Segoe UI"/>
-              </a:rPr>
-              <a:t> par projet</a:t>
-            </a:r>
-          </a:p>
-          <a:p>
-            <a:pPr>
-              <a:spcAft>
-                <a:spcPts val="1000"/>
-              </a:spcAft>
-            </a:pPr>
-            <a:r>
-              <a:rPr b="1" sz="1500">
-                <a:solidFill>
-                  <a:srgbClr val="38BDF8"/>
-                </a:solidFill>
-                <a:latin typeface="Segoe UI"/>
-              </a:rPr>
-              <a:t>• API Swagger</a:t>
-            </a:r>
-            <a:r>
-              <a:rPr sz="1500">
-                <a:solidFill>
-                  <a:srgbClr val="E2E8F0"/>
-                </a:solidFill>
-                <a:latin typeface="Segoe UI"/>
-              </a:rPr>
-              <a:t> /api/docs</a:t>
-            </a:r>
-          </a:p>
-        </p:txBody>
-      </p:sp>
+      <p:graphicFrame>
+        <p:nvGraphicFramePr>
+          <p:cNvPr id="6" name="Table 5"/>
+          <p:cNvGraphicFramePr>
+            <a:graphicFrameLocks noGrp="1"/>
+          </p:cNvGraphicFramePr>
+          <p:nvPr/>
+        </p:nvGraphicFramePr>
+        <p:xfrm>
+          <a:off x="640080" y="1645920"/>
+          <a:ext cx="10972800" cy="2194560"/>
+        </p:xfrm>
+        <a:graphic>
+          <a:graphicData uri="http://schemas.openxmlformats.org/drawingml/2006/table">
+            <a:tbl>
+              <a:tblPr firstRow="1" bandRow="1">
+                <a:tableStyleId>{5C22544A-7EE6-4342-B048-85BDC9FD1C3A}</a:tableStyleId>
+              </a:tblPr>
+              <a:tblGrid>
+                <a:gridCol w="2926080"/>
+                <a:gridCol w="3108960"/>
+                <a:gridCol w="1737360"/>
+                <a:gridCol w="1554480"/>
+                <a:gridCol w="1645920"/>
+              </a:tblGrid>
+              <a:tr h="365760">
+                <a:tc>
+                  <a:txBody>
+                    <a:bodyPr/>
+                    <a:lstStyle/>
+                    <a:p>
+                      <a:r>
+                        <a:rPr sz="1300" b="1">
+                          <a:solidFill>
+                            <a:srgbClr val="38BDF8"/>
+                          </a:solidFill>
+                          <a:latin typeface="Segoe UI"/>
+                        </a:rPr>
+                        <a:t>Service</a:t>
+                      </a:r>
+                    </a:p>
+                  </a:txBody>
+                  <a:tcPr marL="73152" marR="73152" marT="27432" marB="27432">
+                    <a:solidFill>
+                      <a:srgbClr val="24344D"/>
+                    </a:solidFill>
+                  </a:tcPr>
+                </a:tc>
+                <a:tc>
+                  <a:txBody>
+                    <a:bodyPr/>
+                    <a:lstStyle/>
+                    <a:p>
+                      <a:r>
+                        <a:rPr sz="1300" b="1">
+                          <a:solidFill>
+                            <a:srgbClr val="38BDF8"/>
+                          </a:solidFill>
+                          <a:latin typeface="Segoe UI"/>
+                        </a:rPr>
+                        <a:t>Domaine</a:t>
+                      </a:r>
+                    </a:p>
+                  </a:txBody>
+                  <a:tcPr marL="73152" marR="73152" marT="27432" marB="27432">
+                    <a:solidFill>
+                      <a:srgbClr val="24344D"/>
+                    </a:solidFill>
+                  </a:tcPr>
+                </a:tc>
+                <a:tc>
+                  <a:txBody>
+                    <a:bodyPr/>
+                    <a:lstStyle/>
+                    <a:p>
+                      <a:r>
+                        <a:rPr sz="1300" b="1">
+                          <a:solidFill>
+                            <a:srgbClr val="38BDF8"/>
+                          </a:solidFill>
+                          <a:latin typeface="Segoe UI"/>
+                        </a:rPr>
+                        <a:t>Base logique</a:t>
+                      </a:r>
+                    </a:p>
+                  </a:txBody>
+                  <a:tcPr marL="73152" marR="73152" marT="27432" marB="27432">
+                    <a:solidFill>
+                      <a:srgbClr val="24344D"/>
+                    </a:solidFill>
+                  </a:tcPr>
+                </a:tc>
+                <a:tc>
+                  <a:txBody>
+                    <a:bodyPr/>
+                    <a:lstStyle/>
+                    <a:p>
+                      <a:r>
+                        <a:rPr sz="1300" b="1">
+                          <a:solidFill>
+                            <a:srgbClr val="38BDF8"/>
+                          </a:solidFill>
+                          <a:latin typeface="Segoe UI"/>
+                        </a:rPr>
+                        <a:t>SGBD</a:t>
+                      </a:r>
+                    </a:p>
+                  </a:txBody>
+                  <a:tcPr marL="73152" marR="73152" marT="27432" marB="27432">
+                    <a:solidFill>
+                      <a:srgbClr val="24344D"/>
+                    </a:solidFill>
+                  </a:tcPr>
+                </a:tc>
+                <a:tc>
+                  <a:txBody>
+                    <a:bodyPr/>
+                    <a:lstStyle/>
+                    <a:p>
+                      <a:r>
+                        <a:rPr sz="1300" b="1">
+                          <a:solidFill>
+                            <a:srgbClr val="38BDF8"/>
+                          </a:solidFill>
+                          <a:latin typeface="Segoe UI"/>
+                        </a:rPr>
+                        <a:t>Port interne</a:t>
+                      </a:r>
+                    </a:p>
+                  </a:txBody>
+                  <a:tcPr marL="73152" marR="73152" marT="27432" marB="27432">
+                    <a:solidFill>
+                      <a:srgbClr val="24344D"/>
+                    </a:solidFill>
+                  </a:tcPr>
+                </a:tc>
+              </a:tr>
+              <a:tr h="365760">
+                <a:tc>
+                  <a:txBody>
+                    <a:bodyPr/>
+                    <a:lstStyle/>
+                    <a:p>
+                      <a:r>
+                        <a:rPr sz="1300" b="0">
+                          <a:solidFill>
+                            <a:srgbClr val="E2E8F0"/>
+                          </a:solidFill>
+                          <a:latin typeface="Segoe UI"/>
+                        </a:rPr>
+                        <a:t>product-service</a:t>
+                      </a:r>
+                    </a:p>
+                  </a:txBody>
+                  <a:tcPr marL="73152" marR="73152" marT="27432" marB="27432">
+                    <a:solidFill>
+                      <a:srgbClr val="1E293B"/>
+                    </a:solidFill>
+                  </a:tcPr>
+                </a:tc>
+                <a:tc>
+                  <a:txBody>
+                    <a:bodyPr/>
+                    <a:lstStyle/>
+                    <a:p>
+                      <a:r>
+                        <a:rPr sz="1300" b="0">
+                          <a:solidFill>
+                            <a:srgbClr val="E2E8F0"/>
+                          </a:solidFill>
+                          <a:latin typeface="Segoe UI"/>
+                        </a:rPr>
+                        <a:t>Catalogue (produits, catégories)</a:t>
+                      </a:r>
+                    </a:p>
+                  </a:txBody>
+                  <a:tcPr marL="73152" marR="73152" marT="27432" marB="27432">
+                    <a:solidFill>
+                      <a:srgbClr val="1E293B"/>
+                    </a:solidFill>
+                  </a:tcPr>
+                </a:tc>
+                <a:tc>
+                  <a:txBody>
+                    <a:bodyPr/>
+                    <a:lstStyle/>
+                    <a:p>
+                      <a:r>
+                        <a:rPr sz="1300" b="0">
+                          <a:solidFill>
+                            <a:srgbClr val="E2E8F0"/>
+                          </a:solidFill>
+                          <a:latin typeface="Segoe UI"/>
+                        </a:rPr>
+                        <a:t>pfe_products</a:t>
+                      </a:r>
+                    </a:p>
+                  </a:txBody>
+                  <a:tcPr marL="73152" marR="73152" marT="27432" marB="27432">
+                    <a:solidFill>
+                      <a:srgbClr val="1E293B"/>
+                    </a:solidFill>
+                  </a:tcPr>
+                </a:tc>
+                <a:tc>
+                  <a:txBody>
+                    <a:bodyPr/>
+                    <a:lstStyle/>
+                    <a:p>
+                      <a:r>
+                        <a:rPr sz="1300" b="0">
+                          <a:solidFill>
+                            <a:srgbClr val="E2E8F0"/>
+                          </a:solidFill>
+                          <a:latin typeface="Segoe UI"/>
+                        </a:rPr>
+                        <a:t>PostgreSQL</a:t>
+                      </a:r>
+                    </a:p>
+                  </a:txBody>
+                  <a:tcPr marL="73152" marR="73152" marT="27432" marB="27432">
+                    <a:solidFill>
+                      <a:srgbClr val="1E293B"/>
+                    </a:solidFill>
+                  </a:tcPr>
+                </a:tc>
+                <a:tc>
+                  <a:txBody>
+                    <a:bodyPr/>
+                    <a:lstStyle/>
+                    <a:p>
+                      <a:r>
+                        <a:rPr sz="1300" b="0">
+                          <a:solidFill>
+                            <a:srgbClr val="E2E8F0"/>
+                          </a:solidFill>
+                          <a:latin typeface="Segoe UI"/>
+                        </a:rPr>
+                        <a:t>8081</a:t>
+                      </a:r>
+                    </a:p>
+                  </a:txBody>
+                  <a:tcPr marL="73152" marR="73152" marT="27432" marB="27432">
+                    <a:solidFill>
+                      <a:srgbClr val="1E293B"/>
+                    </a:solidFill>
+                  </a:tcPr>
+                </a:tc>
+              </a:tr>
+              <a:tr h="365760">
+                <a:tc>
+                  <a:txBody>
+                    <a:bodyPr/>
+                    <a:lstStyle/>
+                    <a:p>
+                      <a:r>
+                        <a:rPr sz="1300" b="0">
+                          <a:solidFill>
+                            <a:srgbClr val="E2E8F0"/>
+                          </a:solidFill>
+                          <a:latin typeface="Segoe UI"/>
+                        </a:rPr>
+                        <a:t>customer-service</a:t>
+                      </a:r>
+                    </a:p>
+                  </a:txBody>
+                  <a:tcPr marL="73152" marR="73152" marT="27432" marB="27432">
+                    <a:solidFill>
+                      <a:srgbClr val="1E293B"/>
+                    </a:solidFill>
+                  </a:tcPr>
+                </a:tc>
+                <a:tc>
+                  <a:txBody>
+                    <a:bodyPr/>
+                    <a:lstStyle/>
+                    <a:p>
+                      <a:r>
+                        <a:rPr sz="1300" b="0">
+                          <a:solidFill>
+                            <a:srgbClr val="E2E8F0"/>
+                          </a:solidFill>
+                          <a:latin typeface="Segoe UI"/>
+                        </a:rPr>
+                        <a:t>Clients (identité, contact)</a:t>
+                      </a:r>
+                    </a:p>
+                  </a:txBody>
+                  <a:tcPr marL="73152" marR="73152" marT="27432" marB="27432">
+                    <a:solidFill>
+                      <a:srgbClr val="1E293B"/>
+                    </a:solidFill>
+                  </a:tcPr>
+                </a:tc>
+                <a:tc>
+                  <a:txBody>
+                    <a:bodyPr/>
+                    <a:lstStyle/>
+                    <a:p>
+                      <a:r>
+                        <a:rPr sz="1300" b="0">
+                          <a:solidFill>
+                            <a:srgbClr val="E2E8F0"/>
+                          </a:solidFill>
+                          <a:latin typeface="Segoe UI"/>
+                        </a:rPr>
+                        <a:t>pfe_customers</a:t>
+                      </a:r>
+                    </a:p>
+                  </a:txBody>
+                  <a:tcPr marL="73152" marR="73152" marT="27432" marB="27432">
+                    <a:solidFill>
+                      <a:srgbClr val="1E293B"/>
+                    </a:solidFill>
+                  </a:tcPr>
+                </a:tc>
+                <a:tc>
+                  <a:txBody>
+                    <a:bodyPr/>
+                    <a:lstStyle/>
+                    <a:p>
+                      <a:r>
+                        <a:rPr sz="1300" b="0">
+                          <a:solidFill>
+                            <a:srgbClr val="E2E8F0"/>
+                          </a:solidFill>
+                          <a:latin typeface="Segoe UI"/>
+                        </a:rPr>
+                        <a:t>PostgreSQL</a:t>
+                      </a:r>
+                    </a:p>
+                  </a:txBody>
+                  <a:tcPr marL="73152" marR="73152" marT="27432" marB="27432">
+                    <a:solidFill>
+                      <a:srgbClr val="1E293B"/>
+                    </a:solidFill>
+                  </a:tcPr>
+                </a:tc>
+                <a:tc>
+                  <a:txBody>
+                    <a:bodyPr/>
+                    <a:lstStyle/>
+                    <a:p>
+                      <a:r>
+                        <a:rPr sz="1300" b="0">
+                          <a:solidFill>
+                            <a:srgbClr val="E2E8F0"/>
+                          </a:solidFill>
+                          <a:latin typeface="Segoe UI"/>
+                        </a:rPr>
+                        <a:t>8082</a:t>
+                      </a:r>
+                    </a:p>
+                  </a:txBody>
+                  <a:tcPr marL="73152" marR="73152" marT="27432" marB="27432">
+                    <a:solidFill>
+                      <a:srgbClr val="1E293B"/>
+                    </a:solidFill>
+                  </a:tcPr>
+                </a:tc>
+              </a:tr>
+              <a:tr h="365760">
+                <a:tc>
+                  <a:txBody>
+                    <a:bodyPr/>
+                    <a:lstStyle/>
+                    <a:p>
+                      <a:r>
+                        <a:rPr sz="1300" b="0">
+                          <a:solidFill>
+                            <a:srgbClr val="E2E8F0"/>
+                          </a:solidFill>
+                          <a:latin typeface="Segoe UI"/>
+                        </a:rPr>
+                        <a:t>cart-service</a:t>
+                      </a:r>
+                    </a:p>
+                  </a:txBody>
+                  <a:tcPr marL="73152" marR="73152" marT="27432" marB="27432">
+                    <a:solidFill>
+                      <a:srgbClr val="1E293B"/>
+                    </a:solidFill>
+                  </a:tcPr>
+                </a:tc>
+                <a:tc>
+                  <a:txBody>
+                    <a:bodyPr/>
+                    <a:lstStyle/>
+                    <a:p>
+                      <a:r>
+                        <a:rPr sz="1300" b="0">
+                          <a:solidFill>
+                            <a:srgbClr val="E2E8F0"/>
+                          </a:solidFill>
+                          <a:latin typeface="Segoe UI"/>
+                        </a:rPr>
+                        <a:t>Paniers (lignes, quantités)</a:t>
+                      </a:r>
+                    </a:p>
+                  </a:txBody>
+                  <a:tcPr marL="73152" marR="73152" marT="27432" marB="27432">
+                    <a:solidFill>
+                      <a:srgbClr val="1E293B"/>
+                    </a:solidFill>
+                  </a:tcPr>
+                </a:tc>
+                <a:tc>
+                  <a:txBody>
+                    <a:bodyPr/>
+                    <a:lstStyle/>
+                    <a:p>
+                      <a:r>
+                        <a:rPr sz="1300" b="0">
+                          <a:solidFill>
+                            <a:srgbClr val="E2E8F0"/>
+                          </a:solidFill>
+                          <a:latin typeface="Segoe UI"/>
+                        </a:rPr>
+                        <a:t>pfe_carts</a:t>
+                      </a:r>
+                    </a:p>
+                  </a:txBody>
+                  <a:tcPr marL="73152" marR="73152" marT="27432" marB="27432">
+                    <a:solidFill>
+                      <a:srgbClr val="1E293B"/>
+                    </a:solidFill>
+                  </a:tcPr>
+                </a:tc>
+                <a:tc>
+                  <a:txBody>
+                    <a:bodyPr/>
+                    <a:lstStyle/>
+                    <a:p>
+                      <a:r>
+                        <a:rPr sz="1300" b="0">
+                          <a:solidFill>
+                            <a:srgbClr val="E2E8F0"/>
+                          </a:solidFill>
+                          <a:latin typeface="Segoe UI"/>
+                        </a:rPr>
+                        <a:t>MongoDB</a:t>
+                      </a:r>
+                    </a:p>
+                  </a:txBody>
+                  <a:tcPr marL="73152" marR="73152" marT="27432" marB="27432">
+                    <a:solidFill>
+                      <a:srgbClr val="1E293B"/>
+                    </a:solidFill>
+                  </a:tcPr>
+                </a:tc>
+                <a:tc>
+                  <a:txBody>
+                    <a:bodyPr/>
+                    <a:lstStyle/>
+                    <a:p>
+                      <a:r>
+                        <a:rPr sz="1300" b="0">
+                          <a:solidFill>
+                            <a:srgbClr val="E2E8F0"/>
+                          </a:solidFill>
+                          <a:latin typeface="Segoe UI"/>
+                        </a:rPr>
+                        <a:t>8083</a:t>
+                      </a:r>
+                    </a:p>
+                  </a:txBody>
+                  <a:tcPr marL="73152" marR="73152" marT="27432" marB="27432">
+                    <a:solidFill>
+                      <a:srgbClr val="1E293B"/>
+                    </a:solidFill>
+                  </a:tcPr>
+                </a:tc>
+              </a:tr>
+              <a:tr h="365760">
+                <a:tc>
+                  <a:txBody>
+                    <a:bodyPr/>
+                    <a:lstStyle/>
+                    <a:p>
+                      <a:r>
+                        <a:rPr sz="1300" b="0">
+                          <a:solidFill>
+                            <a:srgbClr val="E2E8F0"/>
+                          </a:solidFill>
+                          <a:latin typeface="Segoe UI"/>
+                        </a:rPr>
+                        <a:t>order-service</a:t>
+                      </a:r>
+                    </a:p>
+                  </a:txBody>
+                  <a:tcPr marL="73152" marR="73152" marT="27432" marB="27432">
+                    <a:solidFill>
+                      <a:srgbClr val="1E293B"/>
+                    </a:solidFill>
+                  </a:tcPr>
+                </a:tc>
+                <a:tc>
+                  <a:txBody>
+                    <a:bodyPr/>
+                    <a:lstStyle/>
+                    <a:p>
+                      <a:r>
+                        <a:rPr sz="1300" b="0">
+                          <a:solidFill>
+                            <a:srgbClr val="E2E8F0"/>
+                          </a:solidFill>
+                          <a:latin typeface="Segoe UI"/>
+                        </a:rPr>
+                        <a:t>Commandes (validation, statut)</a:t>
+                      </a:r>
+                    </a:p>
+                  </a:txBody>
+                  <a:tcPr marL="73152" marR="73152" marT="27432" marB="27432">
+                    <a:solidFill>
+                      <a:srgbClr val="1E293B"/>
+                    </a:solidFill>
+                  </a:tcPr>
+                </a:tc>
+                <a:tc>
+                  <a:txBody>
+                    <a:bodyPr/>
+                    <a:lstStyle/>
+                    <a:p>
+                      <a:r>
+                        <a:rPr sz="1300" b="0">
+                          <a:solidFill>
+                            <a:srgbClr val="E2E8F0"/>
+                          </a:solidFill>
+                          <a:latin typeface="Segoe UI"/>
+                        </a:rPr>
+                        <a:t>pfe_orders</a:t>
+                      </a:r>
+                    </a:p>
+                  </a:txBody>
+                  <a:tcPr marL="73152" marR="73152" marT="27432" marB="27432">
+                    <a:solidFill>
+                      <a:srgbClr val="1E293B"/>
+                    </a:solidFill>
+                  </a:tcPr>
+                </a:tc>
+                <a:tc>
+                  <a:txBody>
+                    <a:bodyPr/>
+                    <a:lstStyle/>
+                    <a:p>
+                      <a:r>
+                        <a:rPr sz="1300" b="0">
+                          <a:solidFill>
+                            <a:srgbClr val="E2E8F0"/>
+                          </a:solidFill>
+                          <a:latin typeface="Segoe UI"/>
+                        </a:rPr>
+                        <a:t>MongoDB</a:t>
+                      </a:r>
+                    </a:p>
+                  </a:txBody>
+                  <a:tcPr marL="73152" marR="73152" marT="27432" marB="27432">
+                    <a:solidFill>
+                      <a:srgbClr val="1E293B"/>
+                    </a:solidFill>
+                  </a:tcPr>
+                </a:tc>
+                <a:tc>
+                  <a:txBody>
+                    <a:bodyPr/>
+                    <a:lstStyle/>
+                    <a:p>
+                      <a:r>
+                        <a:rPr sz="1300" b="0">
+                          <a:solidFill>
+                            <a:srgbClr val="E2E8F0"/>
+                          </a:solidFill>
+                          <a:latin typeface="Segoe UI"/>
+                        </a:rPr>
+                        <a:t>8084</a:t>
+                      </a:r>
+                    </a:p>
+                  </a:txBody>
+                  <a:tcPr marL="73152" marR="73152" marT="27432" marB="27432">
+                    <a:solidFill>
+                      <a:srgbClr val="1E293B"/>
+                    </a:solidFill>
+                  </a:tcPr>
+                </a:tc>
+              </a:tr>
+              <a:tr h="365760">
+                <a:tc>
+                  <a:txBody>
+                    <a:bodyPr/>
+                    <a:lstStyle/>
+                    <a:p>
+                      <a:r>
+                        <a:rPr sz="1300" b="0">
+                          <a:solidFill>
+                            <a:srgbClr val="E2E8F0"/>
+                          </a:solidFill>
+                          <a:latin typeface="Segoe UI"/>
+                        </a:rPr>
+                        <a:t>api-gateway / config / discovery</a:t>
+                      </a:r>
+                    </a:p>
+                  </a:txBody>
+                  <a:tcPr marL="73152" marR="73152" marT="27432" marB="27432">
+                    <a:solidFill>
+                      <a:srgbClr val="1E293B"/>
+                    </a:solidFill>
+                  </a:tcPr>
+                </a:tc>
+                <a:tc>
+                  <a:txBody>
+                    <a:bodyPr/>
+                    <a:lstStyle/>
+                    <a:p>
+                      <a:r>
+                        <a:rPr sz="1300" b="0">
+                          <a:solidFill>
+                            <a:srgbClr val="E2E8F0"/>
+                          </a:solidFill>
+                          <a:latin typeface="Segoe UI"/>
+                        </a:rPr>
+                        <a:t>Passerelle · configuration · annuaire</a:t>
+                      </a:r>
+                    </a:p>
+                  </a:txBody>
+                  <a:tcPr marL="73152" marR="73152" marT="27432" marB="27432">
+                    <a:solidFill>
+                      <a:srgbClr val="1E293B"/>
+                    </a:solidFill>
+                  </a:tcPr>
+                </a:tc>
+                <a:tc>
+                  <a:txBody>
+                    <a:bodyPr/>
+                    <a:lstStyle/>
+                    <a:p>
+                      <a:r>
+                        <a:rPr sz="1300" b="0">
+                          <a:solidFill>
+                            <a:srgbClr val="E2E8F0"/>
+                          </a:solidFill>
+                          <a:latin typeface="Segoe UI"/>
+                        </a:rPr>
+                        <a:t>—</a:t>
+                      </a:r>
+                    </a:p>
+                  </a:txBody>
+                  <a:tcPr marL="73152" marR="73152" marT="27432" marB="27432">
+                    <a:solidFill>
+                      <a:srgbClr val="1E293B"/>
+                    </a:solidFill>
+                  </a:tcPr>
+                </a:tc>
+                <a:tc>
+                  <a:txBody>
+                    <a:bodyPr/>
+                    <a:lstStyle/>
+                    <a:p>
+                      <a:r>
+                        <a:rPr sz="1300" b="0">
+                          <a:solidFill>
+                            <a:srgbClr val="E2E8F0"/>
+                          </a:solidFill>
+                          <a:latin typeface="Segoe UI"/>
+                        </a:rPr>
+                        <a:t>—</a:t>
+                      </a:r>
+                    </a:p>
+                  </a:txBody>
+                  <a:tcPr marL="73152" marR="73152" marT="27432" marB="27432">
+                    <a:solidFill>
+                      <a:srgbClr val="1E293B"/>
+                    </a:solidFill>
+                  </a:tcPr>
+                </a:tc>
+                <a:tc>
+                  <a:txBody>
+                    <a:bodyPr/>
+                    <a:lstStyle/>
+                    <a:p>
+                      <a:r>
+                        <a:rPr sz="1300" b="0">
+                          <a:solidFill>
+                            <a:srgbClr val="E2E8F0"/>
+                          </a:solidFill>
+                          <a:latin typeface="Segoe UI"/>
+                        </a:rPr>
+                        <a:t>8090 / 8888 / 8761</a:t>
+                      </a:r>
+                    </a:p>
+                  </a:txBody>
+                  <a:tcPr marL="73152" marR="73152" marT="27432" marB="27432">
+                    <a:solidFill>
+                      <a:srgbClr val="1E293B"/>
+                    </a:solidFill>
+                  </a:tcPr>
+                </a:tc>
+              </a:tr>
+            </a:tbl>
+          </a:graphicData>
+        </a:graphic>
+      </p:graphicFrame>
     </p:spTree>
   </p:cSld>
   <p:clrMapOvr>
@@ -8865,7 +10496,7 @@
                 </a:solidFill>
                 <a:latin typeface="Segoe UI"/>
               </a:rPr>
-              <a:t>L'application — suivi d'un projet</a:t>
+              <a:t>Persistance polyglotte : SQL + NoSQL</a:t>
             </a:r>
           </a:p>
         </p:txBody>
@@ -8900,7 +10531,7 @@
                 </a:solidFill>
                 <a:latin typeface="Segoe UI"/>
               </a:rPr>
-              <a:t>Tâches, statut, date de soutenance</a:t>
+              <a:t>Un SGBD adapté à chaque type de données</a:t>
             </a:r>
           </a:p>
         </p:txBody>
@@ -8969,30 +10600,304 @@
           </a:p>
         </p:txBody>
       </p:sp>
-      <p:pic>
-        <p:nvPicPr>
-          <p:cNvPr id="6" name="Picture 5" descr="app-detail.png"/>
-          <p:cNvPicPr>
-            <a:picLocks noChangeAspect="1"/>
-          </p:cNvPicPr>
-          <p:nvPr/>
-        </p:nvPicPr>
-        <p:blipFill>
-          <a:blip r:embed="rId2"/>
-          <a:stretch>
-            <a:fillRect/>
-          </a:stretch>
-        </p:blipFill>
-        <p:spPr>
-          <a:xfrm>
-            <a:off x="640080" y="1554480"/>
-            <a:ext cx="7498079" cy="4820193"/>
-          </a:xfrm>
-          <a:prstGeom prst="rect">
-            <a:avLst/>
-          </a:prstGeom>
-        </p:spPr>
-      </p:pic>
+      <p:graphicFrame>
+        <p:nvGraphicFramePr>
+          <p:cNvPr id="6" name="Table 5"/>
+          <p:cNvGraphicFramePr>
+            <a:graphicFrameLocks noGrp="1"/>
+          </p:cNvGraphicFramePr>
+          <p:nvPr/>
+        </p:nvGraphicFramePr>
+        <p:xfrm>
+          <a:off x="640080" y="1645920"/>
+          <a:ext cx="10972800" cy="1097280"/>
+        </p:xfrm>
+        <a:graphic>
+          <a:graphicData uri="http://schemas.openxmlformats.org/drawingml/2006/table">
+            <a:tbl>
+              <a:tblPr firstRow="1" bandRow="1">
+                <a:tableStyleId>{5C22544A-7EE6-4342-B048-85BDC9FD1C3A}</a:tableStyleId>
+              </a:tblPr>
+              <a:tblGrid>
+                <a:gridCol w="1737360"/>
+                <a:gridCol w="2834640"/>
+                <a:gridCol w="3108960"/>
+                <a:gridCol w="3291840"/>
+              </a:tblGrid>
+              <a:tr h="365760">
+                <a:tc>
+                  <a:txBody>
+                    <a:bodyPr/>
+                    <a:lstStyle/>
+                    <a:p>
+                      <a:r>
+                        <a:rPr sz="1300" b="1">
+                          <a:solidFill>
+                            <a:srgbClr val="38BDF8"/>
+                          </a:solidFill>
+                          <a:latin typeface="Segoe UI"/>
+                        </a:rPr>
+                        <a:t>Famille</a:t>
+                      </a:r>
+                    </a:p>
+                  </a:txBody>
+                  <a:tcPr marL="73152" marR="73152" marT="27432" marB="27432">
+                    <a:solidFill>
+                      <a:srgbClr val="24344D"/>
+                    </a:solidFill>
+                  </a:tcPr>
+                </a:tc>
+                <a:tc>
+                  <a:txBody>
+                    <a:bodyPr/>
+                    <a:lstStyle/>
+                    <a:p>
+                      <a:r>
+                        <a:rPr sz="1300" b="1">
+                          <a:solidFill>
+                            <a:srgbClr val="38BDF8"/>
+                          </a:solidFill>
+                          <a:latin typeface="Segoe UI"/>
+                        </a:rPr>
+                        <a:t>Services</a:t>
+                      </a:r>
+                    </a:p>
+                  </a:txBody>
+                  <a:tcPr marL="73152" marR="73152" marT="27432" marB="27432">
+                    <a:solidFill>
+                      <a:srgbClr val="24344D"/>
+                    </a:solidFill>
+                  </a:tcPr>
+                </a:tc>
+                <a:tc>
+                  <a:txBody>
+                    <a:bodyPr/>
+                    <a:lstStyle/>
+                    <a:p>
+                      <a:r>
+                        <a:rPr sz="1300" b="1">
+                          <a:solidFill>
+                            <a:srgbClr val="38BDF8"/>
+                          </a:solidFill>
+                          <a:latin typeface="Segoe UI"/>
+                        </a:rPr>
+                        <a:t>SGBD</a:t>
+                      </a:r>
+                    </a:p>
+                  </a:txBody>
+                  <a:tcPr marL="73152" marR="73152" marT="27432" marB="27432">
+                    <a:solidFill>
+                      <a:srgbClr val="24344D"/>
+                    </a:solidFill>
+                  </a:tcPr>
+                </a:tc>
+                <a:tc>
+                  <a:txBody>
+                    <a:bodyPr/>
+                    <a:lstStyle/>
+                    <a:p>
+                      <a:r>
+                        <a:rPr sz="1300" b="1">
+                          <a:solidFill>
+                            <a:srgbClr val="38BDF8"/>
+                          </a:solidFill>
+                          <a:latin typeface="Segoe UI"/>
+                        </a:rPr>
+                        <a:t>Raison</a:t>
+                      </a:r>
+                    </a:p>
+                  </a:txBody>
+                  <a:tcPr marL="73152" marR="73152" marT="27432" marB="27432">
+                    <a:solidFill>
+                      <a:srgbClr val="24344D"/>
+                    </a:solidFill>
+                  </a:tcPr>
+                </a:tc>
+              </a:tr>
+              <a:tr h="365760">
+                <a:tc>
+                  <a:txBody>
+                    <a:bodyPr/>
+                    <a:lstStyle/>
+                    <a:p>
+                      <a:r>
+                        <a:rPr sz="1300" b="0">
+                          <a:solidFill>
+                            <a:srgbClr val="E2E8F0"/>
+                          </a:solidFill>
+                          <a:latin typeface="Segoe UI"/>
+                        </a:rPr>
+                        <a:t>Référentiels</a:t>
+                      </a:r>
+                    </a:p>
+                  </a:txBody>
+                  <a:tcPr marL="73152" marR="73152" marT="27432" marB="27432">
+                    <a:solidFill>
+                      <a:srgbClr val="1E293B"/>
+                    </a:solidFill>
+                  </a:tcPr>
+                </a:tc>
+                <a:tc>
+                  <a:txBody>
+                    <a:bodyPr/>
+                    <a:lstStyle/>
+                    <a:p>
+                      <a:r>
+                        <a:rPr sz="1300" b="0">
+                          <a:solidFill>
+                            <a:srgbClr val="E2E8F0"/>
+                          </a:solidFill>
+                          <a:latin typeface="Segoe UI"/>
+                        </a:rPr>
+                        <a:t>catalogue, clients</a:t>
+                      </a:r>
+                    </a:p>
+                  </a:txBody>
+                  <a:tcPr marL="73152" marR="73152" marT="27432" marB="27432">
+                    <a:solidFill>
+                      <a:srgbClr val="1E293B"/>
+                    </a:solidFill>
+                  </a:tcPr>
+                </a:tc>
+                <a:tc>
+                  <a:txBody>
+                    <a:bodyPr/>
+                    <a:lstStyle/>
+                    <a:p>
+                      <a:r>
+                        <a:rPr sz="1300" b="0">
+                          <a:solidFill>
+                            <a:srgbClr val="E2E8F0"/>
+                          </a:solidFill>
+                          <a:latin typeface="Segoe UI"/>
+                        </a:rPr>
+                        <a:t>PostgreSQL 16 (JPA + Flyway)</a:t>
+                      </a:r>
+                    </a:p>
+                  </a:txBody>
+                  <a:tcPr marL="73152" marR="73152" marT="27432" marB="27432">
+                    <a:solidFill>
+                      <a:srgbClr val="1E293B"/>
+                    </a:solidFill>
+                  </a:tcPr>
+                </a:tc>
+                <a:tc>
+                  <a:txBody>
+                    <a:bodyPr/>
+                    <a:lstStyle/>
+                    <a:p>
+                      <a:r>
+                        <a:rPr sz="1300" b="0">
+                          <a:solidFill>
+                            <a:srgbClr val="E2E8F0"/>
+                          </a:solidFill>
+                          <a:latin typeface="Segoe UI"/>
+                        </a:rPr>
+                        <a:t>unicité, FK, CHECK, transactions ACID</a:t>
+                      </a:r>
+                    </a:p>
+                  </a:txBody>
+                  <a:tcPr marL="73152" marR="73152" marT="27432" marB="27432">
+                    <a:solidFill>
+                      <a:srgbClr val="1E293B"/>
+                    </a:solidFill>
+                  </a:tcPr>
+                </a:tc>
+              </a:tr>
+              <a:tr h="365760">
+                <a:tc>
+                  <a:txBody>
+                    <a:bodyPr/>
+                    <a:lstStyle/>
+                    <a:p>
+                      <a:r>
+                        <a:rPr sz="1300" b="0">
+                          <a:solidFill>
+                            <a:srgbClr val="E2E8F0"/>
+                          </a:solidFill>
+                          <a:latin typeface="Segoe UI"/>
+                        </a:rPr>
+                        <a:t>Agrégats</a:t>
+                      </a:r>
+                    </a:p>
+                  </a:txBody>
+                  <a:tcPr marL="73152" marR="73152" marT="27432" marB="27432">
+                    <a:solidFill>
+                      <a:srgbClr val="1E293B"/>
+                    </a:solidFill>
+                  </a:tcPr>
+                </a:tc>
+                <a:tc>
+                  <a:txBody>
+                    <a:bodyPr/>
+                    <a:lstStyle/>
+                    <a:p>
+                      <a:r>
+                        <a:rPr sz="1300" b="0">
+                          <a:solidFill>
+                            <a:srgbClr val="E2E8F0"/>
+                          </a:solidFill>
+                          <a:latin typeface="Segoe UI"/>
+                        </a:rPr>
+                        <a:t>paniers, commandes</a:t>
+                      </a:r>
+                    </a:p>
+                  </a:txBody>
+                  <a:tcPr marL="73152" marR="73152" marT="27432" marB="27432">
+                    <a:solidFill>
+                      <a:srgbClr val="1E293B"/>
+                    </a:solidFill>
+                  </a:tcPr>
+                </a:tc>
+                <a:tc>
+                  <a:txBody>
+                    <a:bodyPr/>
+                    <a:lstStyle/>
+                    <a:p>
+                      <a:r>
+                        <a:rPr sz="1300" b="0">
+                          <a:solidFill>
+                            <a:srgbClr val="E2E8F0"/>
+                          </a:solidFill>
+                          <a:latin typeface="Segoe UI"/>
+                        </a:rPr>
+                        <a:t>MongoDB 7 (inchangé)</a:t>
+                      </a:r>
+                    </a:p>
+                  </a:txBody>
+                  <a:tcPr marL="73152" marR="73152" marT="27432" marB="27432">
+                    <a:solidFill>
+                      <a:srgbClr val="1E293B"/>
+                    </a:solidFill>
+                  </a:tcPr>
+                </a:tc>
+                <a:tc>
+                  <a:txBody>
+                    <a:bodyPr/>
+                    <a:lstStyle/>
+                    <a:p>
+                      <a:r>
+                        <a:rPr sz="1300" b="0">
+                          <a:solidFill>
+                            <a:srgbClr val="E2E8F0"/>
+                          </a:solidFill>
+                          <a:latin typeface="Segoe UI"/>
+                        </a:rPr>
+                        <a:t>lignes embarquées, snapshots, dénormalisation</a:t>
+                      </a:r>
+                    </a:p>
+                  </a:txBody>
+                  <a:tcPr marL="73152" marR="73152" marT="27432" marB="27432">
+                    <a:solidFill>
+                      <a:srgbClr val="1E293B"/>
+                    </a:solidFill>
+                  </a:tcPr>
+                </a:tc>
+              </a:tr>
+            </a:tbl>
+          </a:graphicData>
+        </a:graphic>
+      </p:graphicFrame>
       <p:sp>
         <p:nvSpPr>
           <p:cNvPr id="7" name="TextBox 6"/>
@@ -9001,8 +10906,8 @@
         </p:nvSpPr>
         <p:spPr>
           <a:xfrm>
-            <a:off x="8412480" y="1645920"/>
-            <a:ext cx="3383280" cy="4114800"/>
+            <a:off x="640080" y="3200400"/>
+            <a:ext cx="10972800" cy="2926080"/>
           </a:xfrm>
           <a:prstGeom prst="rect">
             <a:avLst/>
@@ -9021,22 +10926,22 @@
               </a:spcAft>
             </a:pPr>
             <a:r>
-              <a:rPr b="1" sz="1500">
+              <a:rPr b="1" sz="1400">
                 <a:solidFill>
                   <a:srgbClr val="38BDF8"/>
                 </a:solidFill>
                 <a:latin typeface="Segoe UI"/>
               </a:rPr>
-              <a:t>• Tâches</a:t>
-            </a:r>
-            <a:r>
-              <a:rPr sz="1500">
+              <a:t>• Schéma &amp; données</a:t>
+            </a:r>
+            <a:r>
+              <a:rPr sz="1400">
                 <a:solidFill>
                   <a:srgbClr val="E2E8F0"/>
                 </a:solidFill>
                 <a:latin typeface="Segoe UI"/>
               </a:rPr>
-              <a:t> ajout + bascule terminé</a:t>
+              <a:t> gérés par Flyway (V1 schéma, V2 seed), ddl-auto=validate.</a:t>
             </a:r>
           </a:p>
           <a:p>
@@ -9046,22 +10951,22 @@
               </a:spcAft>
             </a:pPr>
             <a:r>
-              <a:rPr b="1" sz="1500">
+              <a:rPr b="1" sz="1400">
                 <a:solidFill>
                   <a:srgbClr val="38BDF8"/>
                 </a:solidFill>
                 <a:latin typeface="Segoe UI"/>
               </a:rPr>
-              <a:t>• Statut</a:t>
-            </a:r>
-            <a:r>
-              <a:rPr sz="1500">
+              <a:t>• Intégrité</a:t>
+            </a:r>
+            <a:r>
+              <a:rPr sz="1400">
                 <a:solidFill>
                   <a:srgbClr val="E2E8F0"/>
                 </a:solidFill>
                 <a:latin typeface="Segoe UI"/>
               </a:rPr>
-              <a:t> modification en un clic</a:t>
+              <a:t> contraintes au niveau base : UNIQUE email/catégorie, FK produit→catégorie, CHECK prix/stock.</a:t>
             </a:r>
           </a:p>
           <a:p>
@@ -9071,22 +10976,22 @@
               </a:spcAft>
             </a:pPr>
             <a:r>
-              <a:rPr b="1" sz="1500">
+              <a:rPr b="1" sz="1400">
                 <a:solidFill>
                   <a:srgbClr val="38BDF8"/>
                 </a:solidFill>
                 <a:latin typeface="Segoe UI"/>
               </a:rPr>
-              <a:t>• Encadrant</a:t>
-            </a:r>
-            <a:r>
-              <a:rPr sz="1500">
+              <a:t>• Périmètre</a:t>
+            </a:r>
+            <a:r>
+              <a:rPr sz="1400">
                 <a:solidFill>
                   <a:srgbClr val="E2E8F0"/>
                 </a:solidFill>
                 <a:latin typeface="Segoe UI"/>
               </a:rPr>
-              <a:t> étudiant, date de soutenance</a:t>
+              <a:t> migration minimale (2 services / 4) ; contrats d'API et sécurité inchangés.</a:t>
             </a:r>
           </a:p>
           <a:p>
@@ -9096,22 +11001,22 @@
               </a:spcAft>
             </a:pPr>
             <a:r>
-              <a:rPr b="1" sz="1500">
+              <a:rPr b="1" sz="1400">
                 <a:solidFill>
                   <a:srgbClr val="38BDF8"/>
                 </a:solidFill>
                 <a:latin typeface="Segoe UI"/>
               </a:rPr>
-              <a:t>• API REST</a:t>
-            </a:r>
-            <a:r>
-              <a:rPr sz="1500">
+              <a:t>• Préservation</a:t>
+            </a:r>
+            <a:r>
+              <a:rPr sz="1400">
                 <a:solidFill>
                   <a:srgbClr val="E2E8F0"/>
                 </a:solidFill>
                 <a:latin typeface="Segoe UI"/>
               </a:rPr>
-              <a:t> JSON documenté OpenAPI</a:t>
+              <a:t> les données MongoDB historiques restent gelées (rollback possible).</a:t>
             </a:r>
           </a:p>
           <a:p>
@@ -9121,22 +11026,22 @@
               </a:spcAft>
             </a:pPr>
             <a:r>
-              <a:rPr b="1" sz="1500">
+              <a:rPr b="1" sz="1400">
                 <a:solidFill>
                   <a:srgbClr val="38BDF8"/>
                 </a:solidFill>
                 <a:latin typeface="Segoe UI"/>
               </a:rPr>
-              <a:t>• Interface</a:t>
-            </a:r>
-            <a:r>
-              <a:rPr sz="1500">
+              <a:t>• Limite</a:t>
+            </a:r>
+            <a:r>
+              <a:rPr sz="1400">
                 <a:solidFill>
                   <a:srgbClr val="E2E8F0"/>
                 </a:solidFill>
                 <a:latin typeface="Segoe UI"/>
               </a:rPr>
-              <a:t> 100 % hors-ligne (aucun CDN)</a:t>
+              <a:t> pas de transaction inter-bases — cohérence par snapshots et validation amont.</a:t>
             </a:r>
           </a:p>
         </p:txBody>
@@ -9197,7 +11102,7 @@
                 </a:solidFill>
                 <a:latin typeface="Segoe UI"/>
               </a:rPr>
-              <a:t>Conteneurisation</a:t>
+              <a:t>Sécurité : OIDC / OAuth2 avec Keycloak</a:t>
             </a:r>
           </a:p>
         </p:txBody>
@@ -9232,7 +11137,7 @@
                 </a:solidFill>
                 <a:latin typeface="Segoe UI"/>
               </a:rPr>
-              <a:t>Dockerfile multi-stage + Compose</a:t>
+              <a:t>Authentification fédérée, autorisation distribuée</a:t>
             </a:r>
           </a:p>
         </p:txBody>
@@ -9310,7 +11215,7 @@
         <p:spPr>
           <a:xfrm>
             <a:off x="640080" y="1554480"/>
-            <a:ext cx="5669280" cy="4572000"/>
+            <a:ext cx="5760720" cy="4389120"/>
           </a:xfrm>
           <a:prstGeom prst="rect">
             <a:avLst/>
@@ -9329,22 +11234,22 @@
               </a:spcAft>
             </a:pPr>
             <a:r>
-              <a:rPr b="1" sz="1600">
+              <a:rPr b="1" sz="1500">
                 <a:solidFill>
                   <a:srgbClr val="38BDF8"/>
                 </a:solidFill>
                 <a:latin typeface="Segoe UI"/>
               </a:rPr>
-              <a:t>• Étage builder</a:t>
-            </a:r>
-            <a:r>
-              <a:rPr sz="1600">
+              <a:t>• Identité fédérée</a:t>
+            </a:r>
+            <a:r>
+              <a:rPr sz="1500">
                 <a:solidFill>
                   <a:srgbClr val="E2E8F0"/>
                 </a:solidFill>
                 <a:latin typeface="Segoe UI"/>
               </a:rPr>
-              <a:t> venv isolé, pip sans cache, couches invalidées seulement si deps changent.</a:t>
+              <a:t> Keycloak délivre les jetons (OIDC, Authorization Code + PKCE).</a:t>
             </a:r>
           </a:p>
           <a:p>
@@ -9354,22 +11259,22 @@
               </a:spcAft>
             </a:pPr>
             <a:r>
-              <a:rPr b="1" sz="1600">
+              <a:rPr b="1" sz="1500">
                 <a:solidFill>
                   <a:srgbClr val="38BDF8"/>
                 </a:solidFill>
                 <a:latin typeface="Segoe UI"/>
               </a:rPr>
-              <a:t>• Étage runtime</a:t>
-            </a:r>
-            <a:r>
-              <a:rPr sz="1600">
+              <a:t>• JWT</a:t>
+            </a:r>
+            <a:r>
+              <a:rPr sz="1500">
                 <a:solidFill>
                   <a:srgbClr val="E2E8F0"/>
                 </a:solidFill>
                 <a:latin typeface="Segoe UI"/>
               </a:rPr>
-              <a:t> image finale légère : venv + code, sans outils de build.</a:t>
+              <a:t> signature, émetteur (iss) et audience vérifiés par chaque service.</a:t>
             </a:r>
           </a:p>
           <a:p>
@@ -9379,22 +11284,22 @@
               </a:spcAft>
             </a:pPr>
             <a:r>
-              <a:rPr b="1" sz="1600">
+              <a:rPr b="1" sz="1500">
                 <a:solidFill>
                   <a:srgbClr val="38BDF8"/>
                 </a:solidFill>
                 <a:latin typeface="Segoe UI"/>
               </a:rPr>
-              <a:t>• Sécurité</a:t>
-            </a:r>
-            <a:r>
-              <a:rPr sz="1600">
+              <a:t>• Resource servers</a:t>
+            </a:r>
+            <a:r>
+              <a:rPr sz="1500">
                 <a:solidFill>
                   <a:srgbClr val="E2E8F0"/>
                 </a:solidFill>
                 <a:latin typeface="Segoe UI"/>
               </a:rPr>
-              <a:t> utilisateur non-root uid 10001, aucun secret dans l'image.</a:t>
+              <a:t> gateway, cart et order valident le jeton.</a:t>
             </a:r>
           </a:p>
           <a:p>
@@ -9404,22 +11309,22 @@
               </a:spcAft>
             </a:pPr>
             <a:r>
-              <a:rPr b="1" sz="1600">
+              <a:rPr b="1" sz="1500">
                 <a:solidFill>
                   <a:srgbClr val="38BDF8"/>
                 </a:solidFill>
                 <a:latin typeface="Segoe UI"/>
               </a:rPr>
-              <a:t>• Santé</a:t>
-            </a:r>
-            <a:r>
-              <a:rPr sz="1600">
+              <a:t>• Rôles</a:t>
+            </a:r>
+            <a:r>
+              <a:rPr sz="1500">
                 <a:solidFill>
                   <a:srgbClr val="E2E8F0"/>
                 </a:solidFill>
                 <a:latin typeface="Segoe UI"/>
               </a:rPr>
-              <a:t> HEALTHCHECK → Docker détecte et redémarre automatiquement.</a:t>
+              <a:t> ADMIN gère le catalogue et les clients ; CUSTOMER achète.</a:t>
             </a:r>
           </a:p>
           <a:p>
@@ -9429,22 +11334,22 @@
               </a:spcAft>
             </a:pPr>
             <a:r>
-              <a:rPr b="1" sz="1600">
+              <a:rPr b="1" sz="1500">
                 <a:solidFill>
                   <a:srgbClr val="38BDF8"/>
                 </a:solidFill>
                 <a:latin typeface="Segoe UI"/>
               </a:rPr>
-              <a:t>• Compose</a:t>
-            </a:r>
-            <a:r>
-              <a:rPr sz="1600">
+              <a:t>• Propriété</a:t>
+            </a:r>
+            <a:r>
+              <a:rPr sz="1500">
                 <a:solidFill>
                   <a:srgbClr val="E2E8F0"/>
                 </a:solidFill>
                 <a:latin typeface="Segoe UI"/>
               </a:rPr>
-              <a:t> dépendance db : condition: service_healthy, volume persistant.</a:t>
+              <a:t> le customer_id vient du jeton, jamais du navigateur.</a:t>
             </a:r>
           </a:p>
           <a:p>
@@ -9454,22 +11359,22 @@
               </a:spcAft>
             </a:pPr>
             <a:r>
-              <a:rPr b="1" sz="1600">
+              <a:rPr b="1" sz="1500">
                 <a:solidFill>
                   <a:srgbClr val="38BDF8"/>
                 </a:solidFill>
                 <a:latin typeface="Segoe UI"/>
               </a:rPr>
-              <a:t>• Profils</a:t>
-            </a:r>
-            <a:r>
-              <a:rPr sz="1600">
+              <a:t>• Résultat</a:t>
+            </a:r>
+            <a:r>
+              <a:rPr sz="1500">
                 <a:solidFill>
                   <a:srgbClr val="E2E8F0"/>
                 </a:solidFill>
                 <a:latin typeface="Segoe UI"/>
               </a:rPr>
-              <a:t> --profile observability ajoute Prometheus + Grafana.</a:t>
+              <a:t> un client ne voit que ses paniers et commandes (403 sinon).</a:t>
             </a:r>
           </a:p>
         </p:txBody>
@@ -9482,8 +11387,8 @@
         </p:nvSpPr>
         <p:spPr>
           <a:xfrm>
-            <a:off x="6675120" y="1645920"/>
-            <a:ext cx="5212080" cy="3291840"/>
+            <a:off x="6675120" y="1737360"/>
+            <a:ext cx="5120640" cy="2377440"/>
           </a:xfrm>
           <a:prstGeom prst="rect">
             <a:avLst/>
@@ -9503,17 +11408,46 @@
                 </a:solidFill>
                 <a:latin typeface="Consolas"/>
               </a:rPr>
-              <a:t>FROM python:3.14-slim AS builder
-RUN python -m venv /opt/venv
-COPY requirements.txt .
-RUN pip install -r requirements.txt
-FROM python:3.14-slim
-RUN useradd --system --uid 10001 appuser
-COPY --from=builder /opt/venv /opt/venv
-COPY app ./app
-USER appuser
-HEALTHCHECK CMD python -c "urllib...healthz"
-CMD ["uvicorn","app.main:app","--host","0.0.0.0"]</a:t>
+              <a:t>requireOwnership(auth, customerId):
+  if isAdmin(auth): return       # bypass
+  own = customerId(auth)         # claim JWT
+  if own != customerId:
+     -&gt; AccessDenied (403)</a:t>
+            </a:r>
+          </a:p>
+        </p:txBody>
+      </p:sp>
+      <p:sp>
+        <p:nvSpPr>
+          <p:cNvPr id="8" name="TextBox 7"/>
+          <p:cNvSpPr txBox="1"/>
+          <p:nvPr/>
+        </p:nvSpPr>
+        <p:spPr>
+          <a:xfrm>
+            <a:off x="6675120" y="4297680"/>
+            <a:ext cx="5120640" cy="1828800"/>
+          </a:xfrm>
+          <a:prstGeom prst="rect">
+            <a:avLst/>
+          </a:prstGeom>
+          <a:noFill/>
+        </p:spPr>
+        <p:txBody>
+          <a:bodyPr wrap="square" anchor="t">
+            <a:spAutoFit/>
+          </a:bodyPr>
+          <a:lstStyle/>
+          <a:p>
+            <a:pPr algn="l"/>
+            <a:r>
+              <a:rPr sz="1400" b="0">
+                <a:solidFill>
+                  <a:srgbClr val="94A3B8"/>
+                </a:solidFill>
+                <a:latin typeface="Segoe UI"/>
+              </a:rPr>
+              <a:t>Le port de gestion (Actuator) de la passerelle est interne : aucune métrique n'est exposée sur le port public.</a:t>
             </a:r>
           </a:p>
         </p:txBody>
